--- a/Supp Data/Fig S17.pptx
+++ b/Supp Data/Fig S17.pptx
@@ -2,15 +2,15 @@
 <file path=ppt/presentation.xml><?xml version="1.0" encoding="utf-8"?>
 <p:presentation xmlns:a="http://schemas.openxmlformats.org/drawingml/2006/main" xmlns:r="http://schemas.openxmlformats.org/officeDocument/2006/relationships" xmlns:p="http://schemas.openxmlformats.org/presentationml/2006/main" saveSubsetFonts="1" autoCompressPictures="0">
   <p:sldMasterIdLst>
-    <p:sldMasterId id="2147483852" r:id="rId1"/>
+    <p:sldMasterId id="2147484080" r:id="rId1"/>
   </p:sldMasterIdLst>
   <p:notesMasterIdLst>
     <p:notesMasterId r:id="rId3"/>
   </p:notesMasterIdLst>
   <p:sldIdLst>
-    <p:sldId id="280" r:id="rId2"/>
+    <p:sldId id="282" r:id="rId2"/>
   </p:sldIdLst>
-  <p:sldSz cx="1476375" cy="914400"/>
+  <p:sldSz cx="2952750" cy="917575"/>
   <p:notesSz cx="6858000" cy="9144000"/>
   <p:defaultTextStyle>
     <a:defPPr>
@@ -197,7 +197,7 @@
           <a:p>
             <a:fld id="{810CFC23-F338-EB41-8653-4316F1EF48B5}" type="datetimeFigureOut">
               <a:rPr lang="en-DE" smtClean="0"/>
-              <a:t>13.05.26</a:t>
+              <a:t>15.05.26</a:t>
             </a:fld>
             <a:endParaRPr lang="en-DE"/>
           </a:p>
@@ -215,8 +215,8 @@
         </p:nvSpPr>
         <p:spPr>
           <a:xfrm>
-            <a:off x="938213" y="1143000"/>
-            <a:ext cx="4981575" cy="3086100"/>
+            <a:off x="-1536700" y="1143000"/>
+            <a:ext cx="9931400" cy="3086100"/>
           </a:xfrm>
           <a:prstGeom prst="rect">
             <a:avLst/>
@@ -371,8 +371,8 @@
   </p:cSld>
   <p:clrMap bg1="lt1" tx1="dk1" bg2="lt2" tx2="dk2" accent1="accent1" accent2="accent2" accent3="accent3" accent4="accent4" accent5="accent5" accent6="accent6" hlink="hlink" folHlink="folHlink"/>
   <p:notesStyle>
-    <a:lvl1pPr marL="0" algn="l" defTabSz="137691" rtl="0" eaLnBrk="1" latinLnBrk="0" hangingPunct="1">
-      <a:defRPr sz="181" kern="1200">
+    <a:lvl1pPr marL="0" algn="l" defTabSz="200581" rtl="0" eaLnBrk="1" latinLnBrk="0" hangingPunct="1">
+      <a:defRPr sz="263" kern="1200">
         <a:solidFill>
           <a:schemeClr val="tx1"/>
         </a:solidFill>
@@ -381,8 +381,8 @@
         <a:cs typeface="+mn-cs"/>
       </a:defRPr>
     </a:lvl1pPr>
-    <a:lvl2pPr marL="68845" algn="l" defTabSz="137691" rtl="0" eaLnBrk="1" latinLnBrk="0" hangingPunct="1">
-      <a:defRPr sz="181" kern="1200">
+    <a:lvl2pPr marL="100289" algn="l" defTabSz="200581" rtl="0" eaLnBrk="1" latinLnBrk="0" hangingPunct="1">
+      <a:defRPr sz="263" kern="1200">
         <a:solidFill>
           <a:schemeClr val="tx1"/>
         </a:solidFill>
@@ -391,8 +391,8 @@
         <a:cs typeface="+mn-cs"/>
       </a:defRPr>
     </a:lvl2pPr>
-    <a:lvl3pPr marL="137691" algn="l" defTabSz="137691" rtl="0" eaLnBrk="1" latinLnBrk="0" hangingPunct="1">
-      <a:defRPr sz="181" kern="1200">
+    <a:lvl3pPr marL="200581" algn="l" defTabSz="200581" rtl="0" eaLnBrk="1" latinLnBrk="0" hangingPunct="1">
+      <a:defRPr sz="263" kern="1200">
         <a:solidFill>
           <a:schemeClr val="tx1"/>
         </a:solidFill>
@@ -401,8 +401,8 @@
         <a:cs typeface="+mn-cs"/>
       </a:defRPr>
     </a:lvl3pPr>
-    <a:lvl4pPr marL="206537" algn="l" defTabSz="137691" rtl="0" eaLnBrk="1" latinLnBrk="0" hangingPunct="1">
-      <a:defRPr sz="181" kern="1200">
+    <a:lvl4pPr marL="300869" algn="l" defTabSz="200581" rtl="0" eaLnBrk="1" latinLnBrk="0" hangingPunct="1">
+      <a:defRPr sz="263" kern="1200">
         <a:solidFill>
           <a:schemeClr val="tx1"/>
         </a:solidFill>
@@ -411,8 +411,8 @@
         <a:cs typeface="+mn-cs"/>
       </a:defRPr>
     </a:lvl4pPr>
-    <a:lvl5pPr marL="275382" algn="l" defTabSz="137691" rtl="0" eaLnBrk="1" latinLnBrk="0" hangingPunct="1">
-      <a:defRPr sz="181" kern="1200">
+    <a:lvl5pPr marL="401159" algn="l" defTabSz="200581" rtl="0" eaLnBrk="1" latinLnBrk="0" hangingPunct="1">
+      <a:defRPr sz="263" kern="1200">
         <a:solidFill>
           <a:schemeClr val="tx1"/>
         </a:solidFill>
@@ -421,8 +421,8 @@
         <a:cs typeface="+mn-cs"/>
       </a:defRPr>
     </a:lvl5pPr>
-    <a:lvl6pPr marL="344228" algn="l" defTabSz="137691" rtl="0" eaLnBrk="1" latinLnBrk="0" hangingPunct="1">
-      <a:defRPr sz="181" kern="1200">
+    <a:lvl6pPr marL="501449" algn="l" defTabSz="200581" rtl="0" eaLnBrk="1" latinLnBrk="0" hangingPunct="1">
+      <a:defRPr sz="263" kern="1200">
         <a:solidFill>
           <a:schemeClr val="tx1"/>
         </a:solidFill>
@@ -431,8 +431,8 @@
         <a:cs typeface="+mn-cs"/>
       </a:defRPr>
     </a:lvl6pPr>
-    <a:lvl7pPr marL="413073" algn="l" defTabSz="137691" rtl="0" eaLnBrk="1" latinLnBrk="0" hangingPunct="1">
-      <a:defRPr sz="181" kern="1200">
+    <a:lvl7pPr marL="601740" algn="l" defTabSz="200581" rtl="0" eaLnBrk="1" latinLnBrk="0" hangingPunct="1">
+      <a:defRPr sz="263" kern="1200">
         <a:solidFill>
           <a:schemeClr val="tx1"/>
         </a:solidFill>
@@ -441,8 +441,8 @@
         <a:cs typeface="+mn-cs"/>
       </a:defRPr>
     </a:lvl7pPr>
-    <a:lvl8pPr marL="481920" algn="l" defTabSz="137691" rtl="0" eaLnBrk="1" latinLnBrk="0" hangingPunct="1">
-      <a:defRPr sz="181" kern="1200">
+    <a:lvl8pPr marL="702030" algn="l" defTabSz="200581" rtl="0" eaLnBrk="1" latinLnBrk="0" hangingPunct="1">
+      <a:defRPr sz="263" kern="1200">
         <a:solidFill>
           <a:schemeClr val="tx1"/>
         </a:solidFill>
@@ -451,8 +451,8 @@
         <a:cs typeface="+mn-cs"/>
       </a:defRPr>
     </a:lvl8pPr>
-    <a:lvl9pPr marL="550765" algn="l" defTabSz="137691" rtl="0" eaLnBrk="1" latinLnBrk="0" hangingPunct="1">
-      <a:defRPr sz="181" kern="1200">
+    <a:lvl9pPr marL="802318" algn="l" defTabSz="200581" rtl="0" eaLnBrk="1" latinLnBrk="0" hangingPunct="1">
+      <a:defRPr sz="263" kern="1200">
         <a:solidFill>
           <a:schemeClr val="tx1"/>
         </a:solidFill>
@@ -494,8 +494,8 @@
         </p:nvSpPr>
         <p:spPr>
           <a:xfrm>
-            <a:off x="938213" y="1143000"/>
-            <a:ext cx="4981575" cy="3086100"/>
+            <a:off x="-1536700" y="1143000"/>
+            <a:ext cx="9931400" cy="3086100"/>
           </a:xfrm>
         </p:spPr>
       </p:sp>
@@ -514,742 +514,8 @@
           <a:bodyPr/>
           <a:lstStyle/>
           <a:p>
-            <a:r>
-              <a:rPr lang="en-DE" dirty="0"/>
-              <a:t>Main plot 1)</a:t>
-            </a:r>
-          </a:p>
-          <a:p>
             <a:endParaRPr lang="en-DE" dirty="0"/>
           </a:p>
-          <a:p>
-            <a:r>
-              <a:rPr lang="en-DE" dirty="0"/>
-              <a:t>From CS ref,</a:t>
-            </a:r>
-          </a:p>
-          <a:p>
-            <a:endParaRPr lang="en-DE" dirty="0"/>
-          </a:p>
-          <a:p>
-            <a:r>
-              <a:rPr lang="en-GB" dirty="0"/>
-              <a:t>T</a:t>
-            </a:r>
-            <a:r>
-              <a:rPr lang="en-DE" dirty="0"/>
-              <a:t>op left: transcriptome PCA</a:t>
-            </a:r>
-          </a:p>
-          <a:p>
-            <a:pPr marL="0" marR="0" lvl="0" indent="0" algn="l" defTabSz="914400" rtl="0" eaLnBrk="1" fontAlgn="auto" latinLnBrk="0" hangingPunct="1">
-              <a:lnSpc>
-                <a:spcPct val="100000"/>
-              </a:lnSpc>
-              <a:spcBef>
-                <a:spcPts val="0"/>
-              </a:spcBef>
-              <a:spcAft>
-                <a:spcPts val="0"/>
-              </a:spcAft>
-              <a:buClrTx/>
-              <a:buSzTx/>
-              <a:buFontTx/>
-              <a:buNone/>
-              <a:tabLst/>
-              <a:defRPr/>
-            </a:pPr>
-            <a:r>
-              <a:rPr lang="en-GB" dirty="0"/>
-              <a:t>T</a:t>
-            </a:r>
-            <a:r>
-              <a:rPr lang="en-DE" dirty="0"/>
-              <a:t>op right: genotype PCA</a:t>
-            </a:r>
-          </a:p>
-          <a:p>
-            <a:pPr marL="0" marR="0" lvl="0" indent="0" algn="l" defTabSz="914400" rtl="0" eaLnBrk="1" fontAlgn="auto" latinLnBrk="0" hangingPunct="1">
-              <a:lnSpc>
-                <a:spcPct val="100000"/>
-              </a:lnSpc>
-              <a:spcBef>
-                <a:spcPts val="0"/>
-              </a:spcBef>
-              <a:spcAft>
-                <a:spcPts val="0"/>
-              </a:spcAft>
-              <a:buClrTx/>
-              <a:buSzTx/>
-              <a:buFontTx/>
-              <a:buNone/>
-              <a:tabLst/>
-              <a:defRPr/>
-            </a:pPr>
-            <a:r>
-              <a:rPr lang="en-DE" dirty="0"/>
-              <a:t>Bottom left: Venn</a:t>
-            </a:r>
-          </a:p>
-          <a:p>
-            <a:pPr marL="0" marR="0" lvl="0" indent="0" algn="l" defTabSz="914400" rtl="0" eaLnBrk="1" fontAlgn="auto" latinLnBrk="0" hangingPunct="1">
-              <a:lnSpc>
-                <a:spcPct val="100000"/>
-              </a:lnSpc>
-              <a:spcBef>
-                <a:spcPts val="0"/>
-              </a:spcBef>
-              <a:spcAft>
-                <a:spcPts val="0"/>
-              </a:spcAft>
-              <a:buClrTx/>
-              <a:buSzTx/>
-              <a:buFontTx/>
-              <a:buNone/>
-              <a:tabLst/>
-              <a:defRPr/>
-            </a:pPr>
-            <a:r>
-              <a:rPr lang="en-GB" dirty="0"/>
-              <a:t>T</a:t>
-            </a:r>
-            <a:r>
-              <a:rPr lang="en-DE" dirty="0"/>
-              <a:t>op right: Go analysis</a:t>
-            </a:r>
-          </a:p>
-          <a:p>
-            <a:pPr marL="0" marR="0" lvl="0" indent="0" algn="l" defTabSz="914400" rtl="0" eaLnBrk="1" fontAlgn="auto" latinLnBrk="0" hangingPunct="1">
-              <a:lnSpc>
-                <a:spcPct val="100000"/>
-              </a:lnSpc>
-              <a:spcBef>
-                <a:spcPts val="0"/>
-              </a:spcBef>
-              <a:spcAft>
-                <a:spcPts val="0"/>
-              </a:spcAft>
-              <a:buClrTx/>
-              <a:buSzTx/>
-              <a:buFontTx/>
-              <a:buNone/>
-              <a:tabLst/>
-              <a:defRPr/>
-            </a:pPr>
-            <a:endParaRPr lang="en-DE" dirty="0"/>
-          </a:p>
-          <a:p>
-            <a:pPr marL="0" marR="0" lvl="0" indent="0" algn="l" defTabSz="914400" rtl="0" eaLnBrk="1" fontAlgn="auto" latinLnBrk="0" hangingPunct="1">
-              <a:lnSpc>
-                <a:spcPct val="100000"/>
-              </a:lnSpc>
-              <a:spcBef>
-                <a:spcPts val="0"/>
-              </a:spcBef>
-              <a:spcAft>
-                <a:spcPts val="0"/>
-              </a:spcAft>
-              <a:buClrTx/>
-              <a:buSzTx/>
-              <a:buFontTx/>
-              <a:buNone/>
-              <a:tabLst/>
-              <a:defRPr/>
-            </a:pPr>
-            <a:r>
-              <a:rPr lang="en-GB" dirty="0"/>
-              <a:t>I</a:t>
-            </a:r>
-            <a:r>
-              <a:rPr lang="en-DE" dirty="0"/>
-              <a:t>f splitting the venn up, there are the numbers</a:t>
-            </a:r>
-          </a:p>
-          <a:p>
-            <a:pPr marL="0" marR="0" lvl="0" indent="0" algn="l" defTabSz="914400" rtl="0" eaLnBrk="1" fontAlgn="auto" latinLnBrk="0" hangingPunct="1">
-              <a:lnSpc>
-                <a:spcPct val="100000"/>
-              </a:lnSpc>
-              <a:spcBef>
-                <a:spcPts val="0"/>
-              </a:spcBef>
-              <a:spcAft>
-                <a:spcPts val="0"/>
-              </a:spcAft>
-              <a:buClrTx/>
-              <a:buSzTx/>
-              <a:buFontTx/>
-              <a:buNone/>
-              <a:tabLst/>
-              <a:defRPr/>
-            </a:pPr>
-            <a:r>
-              <a:rPr lang="en-GB" dirty="0"/>
-              <a:t>&gt; </a:t>
-            </a:r>
-            <a:r>
-              <a:rPr lang="en-GB" dirty="0" err="1"/>
-              <a:t>nrow</a:t>
-            </a:r>
-            <a:r>
-              <a:rPr lang="en-GB" dirty="0"/>
-              <a:t>(</a:t>
-            </a:r>
-            <a:r>
-              <a:rPr lang="en-GB" dirty="0" err="1"/>
-              <a:t>all.CSvP</a:t>
-            </a:r>
-            <a:r>
-              <a:rPr lang="en-GB" dirty="0"/>
-              <a:t>[</a:t>
-            </a:r>
-            <a:r>
-              <a:rPr lang="en-GB" dirty="0" err="1"/>
-              <a:t>all.CSvP$adj.P.Val</a:t>
-            </a:r>
-            <a:r>
-              <a:rPr lang="en-GB" dirty="0"/>
-              <a:t> &lt; 0.05 &amp; </a:t>
-            </a:r>
-            <a:r>
-              <a:rPr lang="en-GB" dirty="0" err="1"/>
-              <a:t>all.CSvP</a:t>
-            </a:r>
-            <a:r>
-              <a:rPr lang="en-GB" dirty="0"/>
-              <a:t> &gt; 0.58 &amp; </a:t>
-            </a:r>
-            <a:r>
-              <a:rPr lang="en-GB" dirty="0" err="1"/>
-              <a:t>all.CS_PvCSxP$adj.P.Val</a:t>
-            </a:r>
-            <a:r>
-              <a:rPr lang="en-GB" dirty="0"/>
-              <a:t> &lt; 0.05 &amp; </a:t>
-            </a:r>
-            <a:r>
-              <a:rPr lang="en-GB" dirty="0" err="1"/>
-              <a:t>all.CS_PvCSxP$logFC</a:t>
-            </a:r>
-            <a:r>
-              <a:rPr lang="en-GB" dirty="0"/>
-              <a:t> &gt; 0.58,])</a:t>
-            </a:r>
-          </a:p>
-          <a:p>
-            <a:pPr marL="0" marR="0" lvl="0" indent="0" algn="l" defTabSz="914400" rtl="0" eaLnBrk="1" fontAlgn="auto" latinLnBrk="0" hangingPunct="1">
-              <a:lnSpc>
-                <a:spcPct val="100000"/>
-              </a:lnSpc>
-              <a:spcBef>
-                <a:spcPts val="0"/>
-              </a:spcBef>
-              <a:spcAft>
-                <a:spcPts val="0"/>
-              </a:spcAft>
-              <a:buClrTx/>
-              <a:buSzTx/>
-              <a:buFontTx/>
-              <a:buNone/>
-              <a:tabLst/>
-              <a:defRPr/>
-            </a:pPr>
-            <a:r>
-              <a:rPr lang="en-GB" dirty="0"/>
-              <a:t>[1] 3030</a:t>
-            </a:r>
-          </a:p>
-          <a:p>
-            <a:pPr marL="0" marR="0" lvl="0" indent="0" algn="l" defTabSz="914400" rtl="0" eaLnBrk="1" fontAlgn="auto" latinLnBrk="0" hangingPunct="1">
-              <a:lnSpc>
-                <a:spcPct val="100000"/>
-              </a:lnSpc>
-              <a:spcBef>
-                <a:spcPts val="0"/>
-              </a:spcBef>
-              <a:spcAft>
-                <a:spcPts val="0"/>
-              </a:spcAft>
-              <a:buClrTx/>
-              <a:buSzTx/>
-              <a:buFontTx/>
-              <a:buNone/>
-              <a:tabLst/>
-              <a:defRPr/>
-            </a:pPr>
-            <a:r>
-              <a:rPr lang="en-GB" dirty="0"/>
-              <a:t>&gt; </a:t>
-            </a:r>
-            <a:r>
-              <a:rPr lang="en-GB" dirty="0" err="1"/>
-              <a:t>nrow</a:t>
-            </a:r>
-            <a:r>
-              <a:rPr lang="en-GB" dirty="0"/>
-              <a:t>(</a:t>
-            </a:r>
-            <a:r>
-              <a:rPr lang="en-GB" dirty="0" err="1"/>
-              <a:t>all.CSvP</a:t>
-            </a:r>
-            <a:r>
-              <a:rPr lang="en-GB" dirty="0"/>
-              <a:t>[</a:t>
-            </a:r>
-            <a:r>
-              <a:rPr lang="en-GB" dirty="0" err="1"/>
-              <a:t>all.CSvP$adj.P.Val</a:t>
-            </a:r>
-            <a:r>
-              <a:rPr lang="en-GB" dirty="0"/>
-              <a:t> &lt; 0.05 &amp; </a:t>
-            </a:r>
-            <a:r>
-              <a:rPr lang="en-GB" dirty="0" err="1"/>
-              <a:t>all.CSvP</a:t>
-            </a:r>
-            <a:r>
-              <a:rPr lang="en-GB" dirty="0"/>
-              <a:t> &lt; -0.58 &amp; </a:t>
-            </a:r>
-            <a:r>
-              <a:rPr lang="en-GB" dirty="0" err="1"/>
-              <a:t>all.CS_PvCSxP$adj.P.Val</a:t>
-            </a:r>
-            <a:r>
-              <a:rPr lang="en-GB" dirty="0"/>
-              <a:t> &lt; 0.05 &amp; </a:t>
-            </a:r>
-            <a:r>
-              <a:rPr lang="en-GB" dirty="0" err="1"/>
-              <a:t>all.CS_PvCSxP$logFC</a:t>
-            </a:r>
-            <a:r>
-              <a:rPr lang="en-GB" dirty="0"/>
-              <a:t> &lt; -0.58,])</a:t>
-            </a:r>
-          </a:p>
-          <a:p>
-            <a:pPr marL="0" marR="0" lvl="0" indent="0" algn="l" defTabSz="914400" rtl="0" eaLnBrk="1" fontAlgn="auto" latinLnBrk="0" hangingPunct="1">
-              <a:lnSpc>
-                <a:spcPct val="100000"/>
-              </a:lnSpc>
-              <a:spcBef>
-                <a:spcPts val="0"/>
-              </a:spcBef>
-              <a:spcAft>
-                <a:spcPts val="0"/>
-              </a:spcAft>
-              <a:buClrTx/>
-              <a:buSzTx/>
-              <a:buFontTx/>
-              <a:buNone/>
-              <a:tabLst/>
-              <a:defRPr/>
-            </a:pPr>
-            <a:r>
-              <a:rPr lang="en-GB" dirty="0"/>
-              <a:t>[1] 630</a:t>
-            </a:r>
-          </a:p>
-          <a:p>
-            <a:pPr marL="0" marR="0" lvl="0" indent="0" algn="l" defTabSz="914400" rtl="0" eaLnBrk="1" fontAlgn="auto" latinLnBrk="0" hangingPunct="1">
-              <a:lnSpc>
-                <a:spcPct val="100000"/>
-              </a:lnSpc>
-              <a:spcBef>
-                <a:spcPts val="0"/>
-              </a:spcBef>
-              <a:spcAft>
-                <a:spcPts val="0"/>
-              </a:spcAft>
-              <a:buClrTx/>
-              <a:buSzTx/>
-              <a:buFontTx/>
-              <a:buNone/>
-              <a:tabLst/>
-              <a:defRPr/>
-            </a:pPr>
-            <a:r>
-              <a:rPr lang="en-GB" dirty="0"/>
-              <a:t>&gt; </a:t>
-            </a:r>
-            <a:r>
-              <a:rPr lang="en-GB" dirty="0" err="1"/>
-              <a:t>nrow</a:t>
-            </a:r>
-            <a:r>
-              <a:rPr lang="en-GB" dirty="0"/>
-              <a:t>(</a:t>
-            </a:r>
-            <a:r>
-              <a:rPr lang="en-GB" dirty="0" err="1"/>
-              <a:t>all.CSvP</a:t>
-            </a:r>
-            <a:r>
-              <a:rPr lang="en-GB" dirty="0"/>
-              <a:t>[</a:t>
-            </a:r>
-            <a:r>
-              <a:rPr lang="en-GB" dirty="0" err="1"/>
-              <a:t>all.CSvP$adj.P.Val</a:t>
-            </a:r>
-            <a:r>
-              <a:rPr lang="en-GB" dirty="0"/>
-              <a:t> &lt; 0.05 &amp; </a:t>
-            </a:r>
-            <a:r>
-              <a:rPr lang="en-GB" dirty="0" err="1"/>
-              <a:t>all.CSvP</a:t>
-            </a:r>
-            <a:r>
-              <a:rPr lang="en-GB" dirty="0"/>
-              <a:t> &gt; 0.58,])</a:t>
-            </a:r>
-          </a:p>
-          <a:p>
-            <a:pPr marL="0" marR="0" lvl="0" indent="0" algn="l" defTabSz="914400" rtl="0" eaLnBrk="1" fontAlgn="auto" latinLnBrk="0" hangingPunct="1">
-              <a:lnSpc>
-                <a:spcPct val="100000"/>
-              </a:lnSpc>
-              <a:spcBef>
-                <a:spcPts val="0"/>
-              </a:spcBef>
-              <a:spcAft>
-                <a:spcPts val="0"/>
-              </a:spcAft>
-              <a:buClrTx/>
-              <a:buSzTx/>
-              <a:buFontTx/>
-              <a:buNone/>
-              <a:tabLst/>
-              <a:defRPr/>
-            </a:pPr>
-            <a:r>
-              <a:rPr lang="en-GB" dirty="0"/>
-              <a:t>[1] 7579</a:t>
-            </a:r>
-          </a:p>
-          <a:p>
-            <a:pPr marL="0" marR="0" lvl="0" indent="0" algn="l" defTabSz="914400" rtl="0" eaLnBrk="1" fontAlgn="auto" latinLnBrk="0" hangingPunct="1">
-              <a:lnSpc>
-                <a:spcPct val="100000"/>
-              </a:lnSpc>
-              <a:spcBef>
-                <a:spcPts val="0"/>
-              </a:spcBef>
-              <a:spcAft>
-                <a:spcPts val="0"/>
-              </a:spcAft>
-              <a:buClrTx/>
-              <a:buSzTx/>
-              <a:buFontTx/>
-              <a:buNone/>
-              <a:tabLst/>
-              <a:defRPr/>
-            </a:pPr>
-            <a:r>
-              <a:rPr lang="en-GB" dirty="0"/>
-              <a:t>&gt; </a:t>
-            </a:r>
-            <a:r>
-              <a:rPr lang="en-GB" dirty="0" err="1"/>
-              <a:t>nrow</a:t>
-            </a:r>
-            <a:r>
-              <a:rPr lang="en-GB" dirty="0"/>
-              <a:t>(</a:t>
-            </a:r>
-            <a:r>
-              <a:rPr lang="en-GB" dirty="0" err="1"/>
-              <a:t>all.CSvP</a:t>
-            </a:r>
-            <a:r>
-              <a:rPr lang="en-GB" dirty="0"/>
-              <a:t>[</a:t>
-            </a:r>
-            <a:r>
-              <a:rPr lang="en-GB" dirty="0" err="1"/>
-              <a:t>all.CSvP$adj.P.Val</a:t>
-            </a:r>
-            <a:r>
-              <a:rPr lang="en-GB" dirty="0"/>
-              <a:t> &lt; 0.05 &amp; </a:t>
-            </a:r>
-            <a:r>
-              <a:rPr lang="en-GB" dirty="0" err="1"/>
-              <a:t>all.CSvP</a:t>
-            </a:r>
-            <a:r>
-              <a:rPr lang="en-GB" dirty="0"/>
-              <a:t> &lt; -0.58,])</a:t>
-            </a:r>
-          </a:p>
-          <a:p>
-            <a:pPr marL="0" marR="0" lvl="0" indent="0" algn="l" defTabSz="914400" rtl="0" eaLnBrk="1" fontAlgn="auto" latinLnBrk="0" hangingPunct="1">
-              <a:lnSpc>
-                <a:spcPct val="100000"/>
-              </a:lnSpc>
-              <a:spcBef>
-                <a:spcPts val="0"/>
-              </a:spcBef>
-              <a:spcAft>
-                <a:spcPts val="0"/>
-              </a:spcAft>
-              <a:buClrTx/>
-              <a:buSzTx/>
-              <a:buFontTx/>
-              <a:buNone/>
-              <a:tabLst/>
-              <a:defRPr/>
-            </a:pPr>
-            <a:r>
-              <a:rPr lang="en-GB" dirty="0"/>
-              <a:t>[1] 3027</a:t>
-            </a:r>
-          </a:p>
-          <a:p>
-            <a:pPr marL="0" marR="0" lvl="0" indent="0" algn="l" defTabSz="914400" rtl="0" eaLnBrk="1" fontAlgn="auto" latinLnBrk="0" hangingPunct="1">
-              <a:lnSpc>
-                <a:spcPct val="100000"/>
-              </a:lnSpc>
-              <a:spcBef>
-                <a:spcPts val="0"/>
-              </a:spcBef>
-              <a:spcAft>
-                <a:spcPts val="0"/>
-              </a:spcAft>
-              <a:buClrTx/>
-              <a:buSzTx/>
-              <a:buFontTx/>
-              <a:buNone/>
-              <a:tabLst/>
-              <a:defRPr/>
-            </a:pPr>
-            <a:r>
-              <a:rPr lang="en-GB" dirty="0"/>
-              <a:t>&gt; </a:t>
-            </a:r>
-            <a:r>
-              <a:rPr lang="en-GB" dirty="0" err="1"/>
-              <a:t>nrow</a:t>
-            </a:r>
-            <a:r>
-              <a:rPr lang="en-GB" dirty="0"/>
-              <a:t>(</a:t>
-            </a:r>
-            <a:r>
-              <a:rPr lang="en-GB" dirty="0" err="1"/>
-              <a:t>all.CS_PvCSxP</a:t>
-            </a:r>
-            <a:r>
-              <a:rPr lang="en-GB" dirty="0"/>
-              <a:t>[</a:t>
-            </a:r>
-            <a:r>
-              <a:rPr lang="en-GB" dirty="0" err="1"/>
-              <a:t>all.CS_PvCSxP$adj.P.Val</a:t>
-            </a:r>
-            <a:r>
-              <a:rPr lang="en-GB" dirty="0"/>
-              <a:t> &lt; 0.05 &amp; </a:t>
-            </a:r>
-            <a:r>
-              <a:rPr lang="en-GB" dirty="0" err="1"/>
-              <a:t>all.CS_PvCSxP$logFC</a:t>
-            </a:r>
-            <a:r>
-              <a:rPr lang="en-GB" dirty="0"/>
-              <a:t> &gt; 0.58,])</a:t>
-            </a:r>
-          </a:p>
-          <a:p>
-            <a:pPr marL="0" marR="0" lvl="0" indent="0" algn="l" defTabSz="914400" rtl="0" eaLnBrk="1" fontAlgn="auto" latinLnBrk="0" hangingPunct="1">
-              <a:lnSpc>
-                <a:spcPct val="100000"/>
-              </a:lnSpc>
-              <a:spcBef>
-                <a:spcPts val="0"/>
-              </a:spcBef>
-              <a:spcAft>
-                <a:spcPts val="0"/>
-              </a:spcAft>
-              <a:buClrTx/>
-              <a:buSzTx/>
-              <a:buFontTx/>
-              <a:buNone/>
-              <a:tabLst/>
-              <a:defRPr/>
-            </a:pPr>
-            <a:r>
-              <a:rPr lang="en-GB" dirty="0"/>
-              <a:t>[1] 8045</a:t>
-            </a:r>
-          </a:p>
-          <a:p>
-            <a:pPr marL="0" marR="0" lvl="0" indent="0" algn="l" defTabSz="914400" rtl="0" eaLnBrk="1" fontAlgn="auto" latinLnBrk="0" hangingPunct="1">
-              <a:lnSpc>
-                <a:spcPct val="100000"/>
-              </a:lnSpc>
-              <a:spcBef>
-                <a:spcPts val="0"/>
-              </a:spcBef>
-              <a:spcAft>
-                <a:spcPts val="0"/>
-              </a:spcAft>
-              <a:buClrTx/>
-              <a:buSzTx/>
-              <a:buFontTx/>
-              <a:buNone/>
-              <a:tabLst/>
-              <a:defRPr/>
-            </a:pPr>
-            <a:r>
-              <a:rPr lang="en-GB" dirty="0"/>
-              <a:t>&gt; </a:t>
-            </a:r>
-            <a:r>
-              <a:rPr lang="en-GB" dirty="0" err="1"/>
-              <a:t>nrow</a:t>
-            </a:r>
-            <a:r>
-              <a:rPr lang="en-GB" dirty="0"/>
-              <a:t>(</a:t>
-            </a:r>
-            <a:r>
-              <a:rPr lang="en-GB" dirty="0" err="1"/>
-              <a:t>all.CS_PvCSxP</a:t>
-            </a:r>
-            <a:r>
-              <a:rPr lang="en-GB" dirty="0"/>
-              <a:t>[</a:t>
-            </a:r>
-            <a:r>
-              <a:rPr lang="en-GB" dirty="0" err="1"/>
-              <a:t>all.CS_PvCSxP$adj.P.Val</a:t>
-            </a:r>
-            <a:r>
-              <a:rPr lang="en-GB" dirty="0"/>
-              <a:t> &lt; 0.05 &amp; </a:t>
-            </a:r>
-            <a:r>
-              <a:rPr lang="en-GB" dirty="0" err="1"/>
-              <a:t>all.CS_PvCSxP$logFC</a:t>
-            </a:r>
-            <a:r>
-              <a:rPr lang="en-GB" dirty="0"/>
-              <a:t> &lt; -0.58,])</a:t>
-            </a:r>
-          </a:p>
-          <a:p>
-            <a:pPr marL="0" marR="0" lvl="0" indent="0" algn="l" defTabSz="914400" rtl="0" eaLnBrk="1" fontAlgn="auto" latinLnBrk="0" hangingPunct="1">
-              <a:lnSpc>
-                <a:spcPct val="100000"/>
-              </a:lnSpc>
-              <a:spcBef>
-                <a:spcPts val="0"/>
-              </a:spcBef>
-              <a:spcAft>
-                <a:spcPts val="0"/>
-              </a:spcAft>
-              <a:buClrTx/>
-              <a:buSzTx/>
-              <a:buFontTx/>
-              <a:buNone/>
-              <a:tabLst/>
-              <a:defRPr/>
-            </a:pPr>
-            <a:r>
-              <a:rPr lang="en-GB" dirty="0"/>
-              <a:t>[1] 6568</a:t>
-            </a:r>
-          </a:p>
-          <a:p>
-            <a:pPr marL="0" marR="0" lvl="0" indent="0" algn="l" defTabSz="914400" rtl="0" eaLnBrk="1" fontAlgn="auto" latinLnBrk="0" hangingPunct="1">
-              <a:lnSpc>
-                <a:spcPct val="100000"/>
-              </a:lnSpc>
-              <a:spcBef>
-                <a:spcPts val="0"/>
-              </a:spcBef>
-              <a:spcAft>
-                <a:spcPts val="0"/>
-              </a:spcAft>
-              <a:buClrTx/>
-              <a:buSzTx/>
-              <a:buFontTx/>
-              <a:buNone/>
-              <a:tabLst/>
-              <a:defRPr/>
-            </a:pPr>
-            <a:r>
-              <a:rPr lang="en-GB" dirty="0"/>
-              <a:t>&gt; </a:t>
-            </a:r>
-            <a:r>
-              <a:rPr lang="en-GB" dirty="0" err="1"/>
-              <a:t>nrow</a:t>
-            </a:r>
-            <a:r>
-              <a:rPr lang="en-GB" dirty="0"/>
-              <a:t>(</a:t>
-            </a:r>
-            <a:r>
-              <a:rPr lang="en-GB" dirty="0" err="1"/>
-              <a:t>all.CSvP</a:t>
-            </a:r>
-            <a:r>
-              <a:rPr lang="en-GB" dirty="0"/>
-              <a:t>)</a:t>
-            </a:r>
-          </a:p>
-          <a:p>
-            <a:pPr marL="0" marR="0" lvl="0" indent="0" algn="l" defTabSz="914400" rtl="0" eaLnBrk="1" fontAlgn="auto" latinLnBrk="0" hangingPunct="1">
-              <a:lnSpc>
-                <a:spcPct val="100000"/>
-              </a:lnSpc>
-              <a:spcBef>
-                <a:spcPts val="0"/>
-              </a:spcBef>
-              <a:spcAft>
-                <a:spcPts val="0"/>
-              </a:spcAft>
-              <a:buClrTx/>
-              <a:buSzTx/>
-              <a:buFontTx/>
-              <a:buNone/>
-              <a:tabLst/>
-              <a:defRPr/>
-            </a:pPr>
-            <a:r>
-              <a:rPr lang="en-GB" dirty="0"/>
-              <a:t>[1] 35464</a:t>
-            </a:r>
-          </a:p>
-          <a:p>
-            <a:pPr marL="0" marR="0" lvl="0" indent="0" algn="l" defTabSz="914400" rtl="0" eaLnBrk="1" fontAlgn="auto" latinLnBrk="0" hangingPunct="1">
-              <a:lnSpc>
-                <a:spcPct val="100000"/>
-              </a:lnSpc>
-              <a:spcBef>
-                <a:spcPts val="0"/>
-              </a:spcBef>
-              <a:spcAft>
-                <a:spcPts val="0"/>
-              </a:spcAft>
-              <a:buClrTx/>
-              <a:buSzTx/>
-              <a:buFontTx/>
-              <a:buNone/>
-              <a:tabLst/>
-              <a:defRPr/>
-            </a:pPr>
-            <a:endParaRPr lang="en-DE" dirty="0"/>
-          </a:p>
-          <a:p>
-            <a:endParaRPr lang="en-DE" dirty="0"/>
-          </a:p>
         </p:txBody>
       </p:sp>
       <p:sp>
@@ -1267,7 +533,7 @@
           <a:bodyPr/>
           <a:lstStyle/>
           <a:p>
-            <a:fld id="{BA48473D-6385-394A-B5E2-7D1906D53F94}" type="slidenum">
+            <a:fld id="{9047636C-B006-8E47-A161-B8C06667EDC6}" type="slidenum">
               <a:rPr lang="en-DE" smtClean="0"/>
               <a:t>1</a:t>
             </a:fld>
@@ -1278,7 +544,7 @@
     </p:spTree>
     <p:extLst>
       <p:ext uri="{BB962C8B-B14F-4D97-AF65-F5344CB8AC3E}">
-        <p14:creationId xmlns:p14="http://schemas.microsoft.com/office/powerpoint/2010/main" val="2671893520"/>
+        <p14:creationId xmlns:p14="http://schemas.microsoft.com/office/powerpoint/2010/main" val="3460546954"/>
       </p:ext>
     </p:extLst>
   </p:cSld>
@@ -1317,15 +583,15 @@
         </p:nvSpPr>
         <p:spPr>
           <a:xfrm>
-            <a:off x="184547" y="149648"/>
-            <a:ext cx="1107281" cy="318347"/>
+            <a:off x="369094" y="150168"/>
+            <a:ext cx="2214563" cy="319452"/>
           </a:xfrm>
         </p:spPr>
         <p:txBody>
           <a:bodyPr anchor="b"/>
           <a:lstStyle>
             <a:lvl1pPr algn="ctr">
-              <a:defRPr sz="727"/>
+              <a:defRPr sz="803"/>
             </a:lvl1pPr>
           </a:lstStyle>
           <a:p>
@@ -1349,8 +615,8 @@
         </p:nvSpPr>
         <p:spPr>
           <a:xfrm>
-            <a:off x="184547" y="480272"/>
-            <a:ext cx="1107281" cy="220768"/>
+            <a:off x="369094" y="481939"/>
+            <a:ext cx="2214563" cy="221535"/>
           </a:xfrm>
         </p:spPr>
         <p:txBody>
@@ -1358,39 +624,39 @@
           <a:lstStyle>
             <a:lvl1pPr marL="0" indent="0" algn="ctr">
               <a:buNone/>
-              <a:defRPr sz="291"/>
+              <a:defRPr sz="321"/>
             </a:lvl1pPr>
-            <a:lvl2pPr marL="55367" indent="0" algn="ctr">
-              <a:buNone/>
-              <a:defRPr sz="242"/>
+            <a:lvl2pPr marL="61173" indent="0" algn="ctr">
+              <a:buNone/>
+              <a:defRPr sz="268"/>
             </a:lvl2pPr>
-            <a:lvl3pPr marL="110734" indent="0" algn="ctr">
-              <a:buNone/>
-              <a:defRPr sz="218"/>
+            <a:lvl3pPr marL="122347" indent="0" algn="ctr">
+              <a:buNone/>
+              <a:defRPr sz="241"/>
             </a:lvl3pPr>
-            <a:lvl4pPr marL="166101" indent="0" algn="ctr">
-              <a:buNone/>
-              <a:defRPr sz="194"/>
+            <a:lvl4pPr marL="183520" indent="0" algn="ctr">
+              <a:buNone/>
+              <a:defRPr sz="214"/>
             </a:lvl4pPr>
-            <a:lvl5pPr marL="221468" indent="0" algn="ctr">
-              <a:buNone/>
-              <a:defRPr sz="194"/>
+            <a:lvl5pPr marL="244693" indent="0" algn="ctr">
+              <a:buNone/>
+              <a:defRPr sz="214"/>
             </a:lvl5pPr>
-            <a:lvl6pPr marL="276835" indent="0" algn="ctr">
-              <a:buNone/>
-              <a:defRPr sz="194"/>
+            <a:lvl6pPr marL="305867" indent="0" algn="ctr">
+              <a:buNone/>
+              <a:defRPr sz="214"/>
             </a:lvl6pPr>
-            <a:lvl7pPr marL="332202" indent="0" algn="ctr">
-              <a:buNone/>
-              <a:defRPr sz="194"/>
+            <a:lvl7pPr marL="367040" indent="0" algn="ctr">
+              <a:buNone/>
+              <a:defRPr sz="214"/>
             </a:lvl7pPr>
-            <a:lvl8pPr marL="387568" indent="0" algn="ctr">
-              <a:buNone/>
-              <a:defRPr sz="194"/>
+            <a:lvl8pPr marL="428214" indent="0" algn="ctr">
+              <a:buNone/>
+              <a:defRPr sz="214"/>
             </a:lvl8pPr>
-            <a:lvl9pPr marL="442935" indent="0" algn="ctr">
-              <a:buNone/>
-              <a:defRPr sz="194"/>
+            <a:lvl9pPr marL="489387" indent="0" algn="ctr">
+              <a:buNone/>
+              <a:defRPr sz="214"/>
             </a:lvl9pPr>
           </a:lstStyle>
           <a:p>
@@ -1419,7 +685,7 @@
           <a:p>
             <a:fld id="{CF9FBDB8-36C6-4744-999D-C99C2C96D370}" type="datetimeFigureOut">
               <a:rPr lang="en-DE" smtClean="0"/>
-              <a:t>13.05.26</a:t>
+              <a:t>15.05.26</a:t>
             </a:fld>
             <a:endParaRPr lang="en-DE"/>
           </a:p>
@@ -1470,7 +736,7 @@
     </p:spTree>
     <p:extLst>
       <p:ext uri="{BB962C8B-B14F-4D97-AF65-F5344CB8AC3E}">
-        <p14:creationId xmlns:p14="http://schemas.microsoft.com/office/powerpoint/2010/main" val="3275424789"/>
+        <p14:creationId xmlns:p14="http://schemas.microsoft.com/office/powerpoint/2010/main" val="995650126"/>
       </p:ext>
     </p:extLst>
   </p:cSld>
@@ -1589,7 +855,7 @@
           <a:p>
             <a:fld id="{CF9FBDB8-36C6-4744-999D-C99C2C96D370}" type="datetimeFigureOut">
               <a:rPr lang="en-DE" smtClean="0"/>
-              <a:t>13.05.26</a:t>
+              <a:t>15.05.26</a:t>
             </a:fld>
             <a:endParaRPr lang="en-DE"/>
           </a:p>
@@ -1640,7 +906,7 @@
     </p:spTree>
     <p:extLst>
       <p:ext uri="{BB962C8B-B14F-4D97-AF65-F5344CB8AC3E}">
-        <p14:creationId xmlns:p14="http://schemas.microsoft.com/office/powerpoint/2010/main" val="3784610781"/>
+        <p14:creationId xmlns:p14="http://schemas.microsoft.com/office/powerpoint/2010/main" val="3296342284"/>
       </p:ext>
     </p:extLst>
   </p:cSld>
@@ -1679,8 +945,8 @@
         </p:nvSpPr>
         <p:spPr>
           <a:xfrm>
-            <a:off x="1056531" y="48683"/>
-            <a:ext cx="318343" cy="774912"/>
+            <a:off x="2113062" y="48853"/>
+            <a:ext cx="636687" cy="777602"/>
           </a:xfrm>
         </p:spPr>
         <p:txBody>
@@ -1707,8 +973,8 @@
         </p:nvSpPr>
         <p:spPr>
           <a:xfrm>
-            <a:off x="101501" y="48683"/>
-            <a:ext cx="936575" cy="774912"/>
+            <a:off x="203001" y="48853"/>
+            <a:ext cx="1873151" cy="777602"/>
           </a:xfrm>
         </p:spPr>
         <p:txBody>
@@ -1769,7 +1035,7 @@
           <a:p>
             <a:fld id="{CF9FBDB8-36C6-4744-999D-C99C2C96D370}" type="datetimeFigureOut">
               <a:rPr lang="en-DE" smtClean="0"/>
-              <a:t>13.05.26</a:t>
+              <a:t>15.05.26</a:t>
             </a:fld>
             <a:endParaRPr lang="en-DE"/>
           </a:p>
@@ -1820,7 +1086,7 @@
     </p:spTree>
     <p:extLst>
       <p:ext uri="{BB962C8B-B14F-4D97-AF65-F5344CB8AC3E}">
-        <p14:creationId xmlns:p14="http://schemas.microsoft.com/office/powerpoint/2010/main" val="1221852769"/>
+        <p14:creationId xmlns:p14="http://schemas.microsoft.com/office/powerpoint/2010/main" val="3116174124"/>
       </p:ext>
     </p:extLst>
   </p:cSld>
@@ -1939,7 +1205,7 @@
           <a:p>
             <a:fld id="{CF9FBDB8-36C6-4744-999D-C99C2C96D370}" type="datetimeFigureOut">
               <a:rPr lang="en-DE" smtClean="0"/>
-              <a:t>13.05.26</a:t>
+              <a:t>15.05.26</a:t>
             </a:fld>
             <a:endParaRPr lang="en-DE"/>
           </a:p>
@@ -1990,7 +1256,7 @@
     </p:spTree>
     <p:extLst>
       <p:ext uri="{BB962C8B-B14F-4D97-AF65-F5344CB8AC3E}">
-        <p14:creationId xmlns:p14="http://schemas.microsoft.com/office/powerpoint/2010/main" val="3175348454"/>
+        <p14:creationId xmlns:p14="http://schemas.microsoft.com/office/powerpoint/2010/main" val="1928646382"/>
       </p:ext>
     </p:extLst>
   </p:cSld>
@@ -2029,15 +1295,15 @@
         </p:nvSpPr>
         <p:spPr>
           <a:xfrm>
-            <a:off x="100732" y="227965"/>
-            <a:ext cx="1273373" cy="380365"/>
+            <a:off x="201464" y="228757"/>
+            <a:ext cx="2546747" cy="381686"/>
           </a:xfrm>
         </p:spPr>
         <p:txBody>
           <a:bodyPr anchor="b"/>
           <a:lstStyle>
             <a:lvl1pPr>
-              <a:defRPr sz="727"/>
+              <a:defRPr sz="803"/>
             </a:lvl1pPr>
           </a:lstStyle>
           <a:p>
@@ -2061,8 +1327,8 @@
         </p:nvSpPr>
         <p:spPr>
           <a:xfrm>
-            <a:off x="100732" y="611928"/>
-            <a:ext cx="1273373" cy="200025"/>
+            <a:off x="201464" y="614053"/>
+            <a:ext cx="2546747" cy="200719"/>
           </a:xfrm>
         </p:spPr>
         <p:txBody>
@@ -2070,7 +1336,7 @@
           <a:lstStyle>
             <a:lvl1pPr marL="0" indent="0">
               <a:buNone/>
-              <a:defRPr sz="291">
+              <a:defRPr sz="321">
                 <a:solidFill>
                   <a:schemeClr val="tx1">
                     <a:tint val="82000"/>
@@ -2078,9 +1344,9 @@
                 </a:solidFill>
               </a:defRPr>
             </a:lvl1pPr>
-            <a:lvl2pPr marL="55367" indent="0">
-              <a:buNone/>
-              <a:defRPr sz="242">
+            <a:lvl2pPr marL="61173" indent="0">
+              <a:buNone/>
+              <a:defRPr sz="268">
                 <a:solidFill>
                   <a:schemeClr val="tx1">
                     <a:tint val="82000"/>
@@ -2088,9 +1354,9 @@
                 </a:solidFill>
               </a:defRPr>
             </a:lvl2pPr>
-            <a:lvl3pPr marL="110734" indent="0">
-              <a:buNone/>
-              <a:defRPr sz="218">
+            <a:lvl3pPr marL="122347" indent="0">
+              <a:buNone/>
+              <a:defRPr sz="241">
                 <a:solidFill>
                   <a:schemeClr val="tx1">
                     <a:tint val="82000"/>
@@ -2098,9 +1364,9 @@
                 </a:solidFill>
               </a:defRPr>
             </a:lvl3pPr>
-            <a:lvl4pPr marL="166101" indent="0">
-              <a:buNone/>
-              <a:defRPr sz="194">
+            <a:lvl4pPr marL="183520" indent="0">
+              <a:buNone/>
+              <a:defRPr sz="214">
                 <a:solidFill>
                   <a:schemeClr val="tx1">
                     <a:tint val="82000"/>
@@ -2108,9 +1374,9 @@
                 </a:solidFill>
               </a:defRPr>
             </a:lvl4pPr>
-            <a:lvl5pPr marL="221468" indent="0">
-              <a:buNone/>
-              <a:defRPr sz="194">
+            <a:lvl5pPr marL="244693" indent="0">
+              <a:buNone/>
+              <a:defRPr sz="214">
                 <a:solidFill>
                   <a:schemeClr val="tx1">
                     <a:tint val="82000"/>
@@ -2118,9 +1384,9 @@
                 </a:solidFill>
               </a:defRPr>
             </a:lvl5pPr>
-            <a:lvl6pPr marL="276835" indent="0">
-              <a:buNone/>
-              <a:defRPr sz="194">
+            <a:lvl6pPr marL="305867" indent="0">
+              <a:buNone/>
+              <a:defRPr sz="214">
                 <a:solidFill>
                   <a:schemeClr val="tx1">
                     <a:tint val="82000"/>
@@ -2128,9 +1394,9 @@
                 </a:solidFill>
               </a:defRPr>
             </a:lvl6pPr>
-            <a:lvl7pPr marL="332202" indent="0">
-              <a:buNone/>
-              <a:defRPr sz="194">
+            <a:lvl7pPr marL="367040" indent="0">
+              <a:buNone/>
+              <a:defRPr sz="214">
                 <a:solidFill>
                   <a:schemeClr val="tx1">
                     <a:tint val="82000"/>
@@ -2138,9 +1404,9 @@
                 </a:solidFill>
               </a:defRPr>
             </a:lvl7pPr>
-            <a:lvl8pPr marL="387568" indent="0">
-              <a:buNone/>
-              <a:defRPr sz="194">
+            <a:lvl8pPr marL="428214" indent="0">
+              <a:buNone/>
+              <a:defRPr sz="214">
                 <a:solidFill>
                   <a:schemeClr val="tx1">
                     <a:tint val="82000"/>
@@ -2148,9 +1414,9 @@
                 </a:solidFill>
               </a:defRPr>
             </a:lvl8pPr>
-            <a:lvl9pPr marL="442935" indent="0">
-              <a:buNone/>
-              <a:defRPr sz="194">
+            <a:lvl9pPr marL="489387" indent="0">
+              <a:buNone/>
+              <a:defRPr sz="214">
                 <a:solidFill>
                   <a:schemeClr val="tx1">
                     <a:tint val="82000"/>
@@ -2185,7 +1451,7 @@
           <a:p>
             <a:fld id="{CF9FBDB8-36C6-4744-999D-C99C2C96D370}" type="datetimeFigureOut">
               <a:rPr lang="en-DE" smtClean="0"/>
-              <a:t>13.05.26</a:t>
+              <a:t>15.05.26</a:t>
             </a:fld>
             <a:endParaRPr lang="en-DE"/>
           </a:p>
@@ -2236,7 +1502,7 @@
     </p:spTree>
     <p:extLst>
       <p:ext uri="{BB962C8B-B14F-4D97-AF65-F5344CB8AC3E}">
-        <p14:creationId xmlns:p14="http://schemas.microsoft.com/office/powerpoint/2010/main" val="953893014"/>
+        <p14:creationId xmlns:p14="http://schemas.microsoft.com/office/powerpoint/2010/main" val="2668610226"/>
       </p:ext>
     </p:extLst>
   </p:cSld>
@@ -2298,8 +1564,8 @@
         </p:nvSpPr>
         <p:spPr>
           <a:xfrm>
-            <a:off x="101501" y="243417"/>
-            <a:ext cx="627459" cy="580178"/>
+            <a:off x="203001" y="244262"/>
+            <a:ext cx="1254919" cy="582193"/>
           </a:xfrm>
         </p:spPr>
         <p:txBody>
@@ -2355,8 +1621,8 @@
         </p:nvSpPr>
         <p:spPr>
           <a:xfrm>
-            <a:off x="747415" y="243417"/>
-            <a:ext cx="627459" cy="580178"/>
+            <a:off x="1494830" y="244262"/>
+            <a:ext cx="1254919" cy="582193"/>
           </a:xfrm>
         </p:spPr>
         <p:txBody>
@@ -2417,7 +1683,7 @@
           <a:p>
             <a:fld id="{CF9FBDB8-36C6-4744-999D-C99C2C96D370}" type="datetimeFigureOut">
               <a:rPr lang="en-DE" smtClean="0"/>
-              <a:t>13.05.26</a:t>
+              <a:t>15.05.26</a:t>
             </a:fld>
             <a:endParaRPr lang="en-DE"/>
           </a:p>
@@ -2468,7 +1734,7 @@
     </p:spTree>
     <p:extLst>
       <p:ext uri="{BB962C8B-B14F-4D97-AF65-F5344CB8AC3E}">
-        <p14:creationId xmlns:p14="http://schemas.microsoft.com/office/powerpoint/2010/main" val="1293684951"/>
+        <p14:creationId xmlns:p14="http://schemas.microsoft.com/office/powerpoint/2010/main" val="1714796461"/>
       </p:ext>
     </p:extLst>
   </p:cSld>
@@ -2507,8 +1773,8 @@
         </p:nvSpPr>
         <p:spPr>
           <a:xfrm>
-            <a:off x="101693" y="48683"/>
-            <a:ext cx="1273373" cy="176742"/>
+            <a:off x="203386" y="48853"/>
+            <a:ext cx="2546747" cy="177355"/>
           </a:xfrm>
         </p:spPr>
         <p:txBody>
@@ -2535,8 +1801,8 @@
         </p:nvSpPr>
         <p:spPr>
           <a:xfrm>
-            <a:off x="101693" y="224155"/>
-            <a:ext cx="624576" cy="109855"/>
+            <a:off x="203386" y="224934"/>
+            <a:ext cx="1249152" cy="110236"/>
           </a:xfrm>
         </p:spPr>
         <p:txBody>
@@ -2544,39 +1810,39 @@
           <a:lstStyle>
             <a:lvl1pPr marL="0" indent="0">
               <a:buNone/>
-              <a:defRPr sz="291" b="1"/>
+              <a:defRPr sz="321" b="1"/>
             </a:lvl1pPr>
-            <a:lvl2pPr marL="55367" indent="0">
-              <a:buNone/>
-              <a:defRPr sz="242" b="1"/>
+            <a:lvl2pPr marL="61173" indent="0">
+              <a:buNone/>
+              <a:defRPr sz="268" b="1"/>
             </a:lvl2pPr>
-            <a:lvl3pPr marL="110734" indent="0">
-              <a:buNone/>
-              <a:defRPr sz="218" b="1"/>
+            <a:lvl3pPr marL="122347" indent="0">
+              <a:buNone/>
+              <a:defRPr sz="241" b="1"/>
             </a:lvl3pPr>
-            <a:lvl4pPr marL="166101" indent="0">
-              <a:buNone/>
-              <a:defRPr sz="194" b="1"/>
+            <a:lvl4pPr marL="183520" indent="0">
+              <a:buNone/>
+              <a:defRPr sz="214" b="1"/>
             </a:lvl4pPr>
-            <a:lvl5pPr marL="221468" indent="0">
-              <a:buNone/>
-              <a:defRPr sz="194" b="1"/>
+            <a:lvl5pPr marL="244693" indent="0">
+              <a:buNone/>
+              <a:defRPr sz="214" b="1"/>
             </a:lvl5pPr>
-            <a:lvl6pPr marL="276835" indent="0">
-              <a:buNone/>
-              <a:defRPr sz="194" b="1"/>
+            <a:lvl6pPr marL="305867" indent="0">
+              <a:buNone/>
+              <a:defRPr sz="214" b="1"/>
             </a:lvl6pPr>
-            <a:lvl7pPr marL="332202" indent="0">
-              <a:buNone/>
-              <a:defRPr sz="194" b="1"/>
+            <a:lvl7pPr marL="367040" indent="0">
+              <a:buNone/>
+              <a:defRPr sz="214" b="1"/>
             </a:lvl7pPr>
-            <a:lvl8pPr marL="387568" indent="0">
-              <a:buNone/>
-              <a:defRPr sz="194" b="1"/>
+            <a:lvl8pPr marL="428214" indent="0">
+              <a:buNone/>
+              <a:defRPr sz="214" b="1"/>
             </a:lvl8pPr>
-            <a:lvl9pPr marL="442935" indent="0">
-              <a:buNone/>
-              <a:defRPr sz="194" b="1"/>
+            <a:lvl9pPr marL="489387" indent="0">
+              <a:buNone/>
+              <a:defRPr sz="214" b="1"/>
             </a:lvl9pPr>
           </a:lstStyle>
           <a:p>
@@ -2600,8 +1866,8 @@
         </p:nvSpPr>
         <p:spPr>
           <a:xfrm>
-            <a:off x="101693" y="334010"/>
-            <a:ext cx="624576" cy="491278"/>
+            <a:off x="203386" y="335170"/>
+            <a:ext cx="1249152" cy="492984"/>
           </a:xfrm>
         </p:spPr>
         <p:txBody>
@@ -2657,8 +1923,8 @@
         </p:nvSpPr>
         <p:spPr>
           <a:xfrm>
-            <a:off x="747415" y="224155"/>
-            <a:ext cx="627652" cy="109855"/>
+            <a:off x="1494830" y="224934"/>
+            <a:ext cx="1255303" cy="110236"/>
           </a:xfrm>
         </p:spPr>
         <p:txBody>
@@ -2666,39 +1932,39 @@
           <a:lstStyle>
             <a:lvl1pPr marL="0" indent="0">
               <a:buNone/>
-              <a:defRPr sz="291" b="1"/>
+              <a:defRPr sz="321" b="1"/>
             </a:lvl1pPr>
-            <a:lvl2pPr marL="55367" indent="0">
-              <a:buNone/>
-              <a:defRPr sz="242" b="1"/>
+            <a:lvl2pPr marL="61173" indent="0">
+              <a:buNone/>
+              <a:defRPr sz="268" b="1"/>
             </a:lvl2pPr>
-            <a:lvl3pPr marL="110734" indent="0">
-              <a:buNone/>
-              <a:defRPr sz="218" b="1"/>
+            <a:lvl3pPr marL="122347" indent="0">
+              <a:buNone/>
+              <a:defRPr sz="241" b="1"/>
             </a:lvl3pPr>
-            <a:lvl4pPr marL="166101" indent="0">
-              <a:buNone/>
-              <a:defRPr sz="194" b="1"/>
+            <a:lvl4pPr marL="183520" indent="0">
+              <a:buNone/>
+              <a:defRPr sz="214" b="1"/>
             </a:lvl4pPr>
-            <a:lvl5pPr marL="221468" indent="0">
-              <a:buNone/>
-              <a:defRPr sz="194" b="1"/>
+            <a:lvl5pPr marL="244693" indent="0">
+              <a:buNone/>
+              <a:defRPr sz="214" b="1"/>
             </a:lvl5pPr>
-            <a:lvl6pPr marL="276835" indent="0">
-              <a:buNone/>
-              <a:defRPr sz="194" b="1"/>
+            <a:lvl6pPr marL="305867" indent="0">
+              <a:buNone/>
+              <a:defRPr sz="214" b="1"/>
             </a:lvl6pPr>
-            <a:lvl7pPr marL="332202" indent="0">
-              <a:buNone/>
-              <a:defRPr sz="194" b="1"/>
+            <a:lvl7pPr marL="367040" indent="0">
+              <a:buNone/>
+              <a:defRPr sz="214" b="1"/>
             </a:lvl7pPr>
-            <a:lvl8pPr marL="387568" indent="0">
-              <a:buNone/>
-              <a:defRPr sz="194" b="1"/>
+            <a:lvl8pPr marL="428214" indent="0">
+              <a:buNone/>
+              <a:defRPr sz="214" b="1"/>
             </a:lvl8pPr>
-            <a:lvl9pPr marL="442935" indent="0">
-              <a:buNone/>
-              <a:defRPr sz="194" b="1"/>
+            <a:lvl9pPr marL="489387" indent="0">
+              <a:buNone/>
+              <a:defRPr sz="214" b="1"/>
             </a:lvl9pPr>
           </a:lstStyle>
           <a:p>
@@ -2722,8 +1988,8 @@
         </p:nvSpPr>
         <p:spPr>
           <a:xfrm>
-            <a:off x="747415" y="334010"/>
-            <a:ext cx="627652" cy="491278"/>
+            <a:off x="1494830" y="335170"/>
+            <a:ext cx="1255303" cy="492984"/>
           </a:xfrm>
         </p:spPr>
         <p:txBody>
@@ -2784,7 +2050,7 @@
           <a:p>
             <a:fld id="{CF9FBDB8-36C6-4744-999D-C99C2C96D370}" type="datetimeFigureOut">
               <a:rPr lang="en-DE" smtClean="0"/>
-              <a:t>13.05.26</a:t>
+              <a:t>15.05.26</a:t>
             </a:fld>
             <a:endParaRPr lang="en-DE"/>
           </a:p>
@@ -2835,7 +2101,7 @@
     </p:spTree>
     <p:extLst>
       <p:ext uri="{BB962C8B-B14F-4D97-AF65-F5344CB8AC3E}">
-        <p14:creationId xmlns:p14="http://schemas.microsoft.com/office/powerpoint/2010/main" val="3069077292"/>
+        <p14:creationId xmlns:p14="http://schemas.microsoft.com/office/powerpoint/2010/main" val="1947710852"/>
       </p:ext>
     </p:extLst>
   </p:cSld>
@@ -2902,7 +2168,7 @@
           <a:p>
             <a:fld id="{CF9FBDB8-36C6-4744-999D-C99C2C96D370}" type="datetimeFigureOut">
               <a:rPr lang="en-DE" smtClean="0"/>
-              <a:t>13.05.26</a:t>
+              <a:t>15.05.26</a:t>
             </a:fld>
             <a:endParaRPr lang="en-DE"/>
           </a:p>
@@ -2953,7 +2219,7 @@
     </p:spTree>
     <p:extLst>
       <p:ext uri="{BB962C8B-B14F-4D97-AF65-F5344CB8AC3E}">
-        <p14:creationId xmlns:p14="http://schemas.microsoft.com/office/powerpoint/2010/main" val="190454464"/>
+        <p14:creationId xmlns:p14="http://schemas.microsoft.com/office/powerpoint/2010/main" val="1686456351"/>
       </p:ext>
     </p:extLst>
   </p:cSld>
@@ -2997,7 +2263,7 @@
           <a:p>
             <a:fld id="{CF9FBDB8-36C6-4744-999D-C99C2C96D370}" type="datetimeFigureOut">
               <a:rPr lang="en-DE" smtClean="0"/>
-              <a:t>13.05.26</a:t>
+              <a:t>15.05.26</a:t>
             </a:fld>
             <a:endParaRPr lang="en-DE"/>
           </a:p>
@@ -3048,7 +2314,7 @@
     </p:spTree>
     <p:extLst>
       <p:ext uri="{BB962C8B-B14F-4D97-AF65-F5344CB8AC3E}">
-        <p14:creationId xmlns:p14="http://schemas.microsoft.com/office/powerpoint/2010/main" val="97199948"/>
+        <p14:creationId xmlns:p14="http://schemas.microsoft.com/office/powerpoint/2010/main" val="2303372285"/>
       </p:ext>
     </p:extLst>
   </p:cSld>
@@ -3087,15 +2353,15 @@
         </p:nvSpPr>
         <p:spPr>
           <a:xfrm>
-            <a:off x="101693" y="60960"/>
-            <a:ext cx="476169" cy="213360"/>
+            <a:off x="203386" y="61172"/>
+            <a:ext cx="952339" cy="214101"/>
           </a:xfrm>
         </p:spPr>
         <p:txBody>
           <a:bodyPr anchor="b"/>
           <a:lstStyle>
             <a:lvl1pPr>
-              <a:defRPr sz="388"/>
+              <a:defRPr sz="428"/>
             </a:lvl1pPr>
           </a:lstStyle>
           <a:p>
@@ -3119,39 +2385,39 @@
         </p:nvSpPr>
         <p:spPr>
           <a:xfrm>
-            <a:off x="627652" y="131657"/>
-            <a:ext cx="747415" cy="649817"/>
+            <a:off x="1255303" y="132114"/>
+            <a:ext cx="1494830" cy="652073"/>
           </a:xfrm>
         </p:spPr>
         <p:txBody>
           <a:bodyPr/>
           <a:lstStyle>
             <a:lvl1pPr>
-              <a:defRPr sz="388"/>
+              <a:defRPr sz="428"/>
             </a:lvl1pPr>
             <a:lvl2pPr>
-              <a:defRPr sz="339"/>
+              <a:defRPr sz="375"/>
             </a:lvl2pPr>
             <a:lvl3pPr>
-              <a:defRPr sz="291"/>
+              <a:defRPr sz="321"/>
             </a:lvl3pPr>
             <a:lvl4pPr>
-              <a:defRPr sz="242"/>
+              <a:defRPr sz="268"/>
             </a:lvl4pPr>
             <a:lvl5pPr>
-              <a:defRPr sz="242"/>
+              <a:defRPr sz="268"/>
             </a:lvl5pPr>
             <a:lvl6pPr>
-              <a:defRPr sz="242"/>
+              <a:defRPr sz="268"/>
             </a:lvl6pPr>
             <a:lvl7pPr>
-              <a:defRPr sz="242"/>
+              <a:defRPr sz="268"/>
             </a:lvl7pPr>
             <a:lvl8pPr>
-              <a:defRPr sz="242"/>
+              <a:defRPr sz="268"/>
             </a:lvl8pPr>
             <a:lvl9pPr>
-              <a:defRPr sz="242"/>
+              <a:defRPr sz="268"/>
             </a:lvl9pPr>
           </a:lstStyle>
           <a:p>
@@ -3204,8 +2470,8 @@
         </p:nvSpPr>
         <p:spPr>
           <a:xfrm>
-            <a:off x="101693" y="274320"/>
-            <a:ext cx="476169" cy="508212"/>
+            <a:off x="203386" y="275273"/>
+            <a:ext cx="952339" cy="509976"/>
           </a:xfrm>
         </p:spPr>
         <p:txBody>
@@ -3213,39 +2479,39 @@
           <a:lstStyle>
             <a:lvl1pPr marL="0" indent="0">
               <a:buNone/>
-              <a:defRPr sz="194"/>
+              <a:defRPr sz="214"/>
             </a:lvl1pPr>
-            <a:lvl2pPr marL="55367" indent="0">
-              <a:buNone/>
-              <a:defRPr sz="170"/>
+            <a:lvl2pPr marL="61173" indent="0">
+              <a:buNone/>
+              <a:defRPr sz="187"/>
             </a:lvl2pPr>
-            <a:lvl3pPr marL="110734" indent="0">
-              <a:buNone/>
-              <a:defRPr sz="145"/>
+            <a:lvl3pPr marL="122347" indent="0">
+              <a:buNone/>
+              <a:defRPr sz="161"/>
             </a:lvl3pPr>
-            <a:lvl4pPr marL="166101" indent="0">
-              <a:buNone/>
-              <a:defRPr sz="121"/>
+            <a:lvl4pPr marL="183520" indent="0">
+              <a:buNone/>
+              <a:defRPr sz="134"/>
             </a:lvl4pPr>
-            <a:lvl5pPr marL="221468" indent="0">
-              <a:buNone/>
-              <a:defRPr sz="121"/>
+            <a:lvl5pPr marL="244693" indent="0">
+              <a:buNone/>
+              <a:defRPr sz="134"/>
             </a:lvl5pPr>
-            <a:lvl6pPr marL="276835" indent="0">
-              <a:buNone/>
-              <a:defRPr sz="121"/>
+            <a:lvl6pPr marL="305867" indent="0">
+              <a:buNone/>
+              <a:defRPr sz="134"/>
             </a:lvl6pPr>
-            <a:lvl7pPr marL="332202" indent="0">
-              <a:buNone/>
-              <a:defRPr sz="121"/>
+            <a:lvl7pPr marL="367040" indent="0">
+              <a:buNone/>
+              <a:defRPr sz="134"/>
             </a:lvl7pPr>
-            <a:lvl8pPr marL="387568" indent="0">
-              <a:buNone/>
-              <a:defRPr sz="121"/>
+            <a:lvl8pPr marL="428214" indent="0">
+              <a:buNone/>
+              <a:defRPr sz="134"/>
             </a:lvl8pPr>
-            <a:lvl9pPr marL="442935" indent="0">
-              <a:buNone/>
-              <a:defRPr sz="121"/>
+            <a:lvl9pPr marL="489387" indent="0">
+              <a:buNone/>
+              <a:defRPr sz="134"/>
             </a:lvl9pPr>
           </a:lstStyle>
           <a:p>
@@ -3274,7 +2540,7 @@
           <a:p>
             <a:fld id="{CF9FBDB8-36C6-4744-999D-C99C2C96D370}" type="datetimeFigureOut">
               <a:rPr lang="en-DE" smtClean="0"/>
-              <a:t>13.05.26</a:t>
+              <a:t>15.05.26</a:t>
             </a:fld>
             <a:endParaRPr lang="en-DE"/>
           </a:p>
@@ -3325,7 +2591,7 @@
     </p:spTree>
     <p:extLst>
       <p:ext uri="{BB962C8B-B14F-4D97-AF65-F5344CB8AC3E}">
-        <p14:creationId xmlns:p14="http://schemas.microsoft.com/office/powerpoint/2010/main" val="705921993"/>
+        <p14:creationId xmlns:p14="http://schemas.microsoft.com/office/powerpoint/2010/main" val="3492032814"/>
       </p:ext>
     </p:extLst>
   </p:cSld>
@@ -3364,15 +2630,15 @@
         </p:nvSpPr>
         <p:spPr>
           <a:xfrm>
-            <a:off x="101693" y="60960"/>
-            <a:ext cx="476169" cy="213360"/>
+            <a:off x="203386" y="61172"/>
+            <a:ext cx="952339" cy="214101"/>
           </a:xfrm>
         </p:spPr>
         <p:txBody>
           <a:bodyPr anchor="b"/>
           <a:lstStyle>
             <a:lvl1pPr>
-              <a:defRPr sz="388"/>
+              <a:defRPr sz="428"/>
             </a:lvl1pPr>
           </a:lstStyle>
           <a:p>
@@ -3396,8 +2662,8 @@
         </p:nvSpPr>
         <p:spPr>
           <a:xfrm>
-            <a:off x="627652" y="131657"/>
-            <a:ext cx="747415" cy="649817"/>
+            <a:off x="1255303" y="132114"/>
+            <a:ext cx="1494830" cy="652073"/>
           </a:xfrm>
         </p:spPr>
         <p:txBody>
@@ -3405,39 +2671,39 @@
           <a:lstStyle>
             <a:lvl1pPr marL="0" indent="0">
               <a:buNone/>
-              <a:defRPr sz="388"/>
+              <a:defRPr sz="428"/>
             </a:lvl1pPr>
-            <a:lvl2pPr marL="55367" indent="0">
-              <a:buNone/>
-              <a:defRPr sz="339"/>
+            <a:lvl2pPr marL="61173" indent="0">
+              <a:buNone/>
+              <a:defRPr sz="375"/>
             </a:lvl2pPr>
-            <a:lvl3pPr marL="110734" indent="0">
-              <a:buNone/>
-              <a:defRPr sz="291"/>
+            <a:lvl3pPr marL="122347" indent="0">
+              <a:buNone/>
+              <a:defRPr sz="321"/>
             </a:lvl3pPr>
-            <a:lvl4pPr marL="166101" indent="0">
-              <a:buNone/>
-              <a:defRPr sz="242"/>
+            <a:lvl4pPr marL="183520" indent="0">
+              <a:buNone/>
+              <a:defRPr sz="268"/>
             </a:lvl4pPr>
-            <a:lvl5pPr marL="221468" indent="0">
-              <a:buNone/>
-              <a:defRPr sz="242"/>
+            <a:lvl5pPr marL="244693" indent="0">
+              <a:buNone/>
+              <a:defRPr sz="268"/>
             </a:lvl5pPr>
-            <a:lvl6pPr marL="276835" indent="0">
-              <a:buNone/>
-              <a:defRPr sz="242"/>
+            <a:lvl6pPr marL="305867" indent="0">
+              <a:buNone/>
+              <a:defRPr sz="268"/>
             </a:lvl6pPr>
-            <a:lvl7pPr marL="332202" indent="0">
-              <a:buNone/>
-              <a:defRPr sz="242"/>
+            <a:lvl7pPr marL="367040" indent="0">
+              <a:buNone/>
+              <a:defRPr sz="268"/>
             </a:lvl7pPr>
-            <a:lvl8pPr marL="387568" indent="0">
-              <a:buNone/>
-              <a:defRPr sz="242"/>
+            <a:lvl8pPr marL="428214" indent="0">
+              <a:buNone/>
+              <a:defRPr sz="268"/>
             </a:lvl8pPr>
-            <a:lvl9pPr marL="442935" indent="0">
-              <a:buNone/>
-              <a:defRPr sz="242"/>
+            <a:lvl9pPr marL="489387" indent="0">
+              <a:buNone/>
+              <a:defRPr sz="268"/>
             </a:lvl9pPr>
           </a:lstStyle>
           <a:p>
@@ -3461,8 +2727,8 @@
         </p:nvSpPr>
         <p:spPr>
           <a:xfrm>
-            <a:off x="101693" y="274320"/>
-            <a:ext cx="476169" cy="508212"/>
+            <a:off x="203386" y="275273"/>
+            <a:ext cx="952339" cy="509976"/>
           </a:xfrm>
         </p:spPr>
         <p:txBody>
@@ -3470,39 +2736,39 @@
           <a:lstStyle>
             <a:lvl1pPr marL="0" indent="0">
               <a:buNone/>
-              <a:defRPr sz="194"/>
+              <a:defRPr sz="214"/>
             </a:lvl1pPr>
-            <a:lvl2pPr marL="55367" indent="0">
-              <a:buNone/>
-              <a:defRPr sz="170"/>
+            <a:lvl2pPr marL="61173" indent="0">
+              <a:buNone/>
+              <a:defRPr sz="187"/>
             </a:lvl2pPr>
-            <a:lvl3pPr marL="110734" indent="0">
-              <a:buNone/>
-              <a:defRPr sz="145"/>
+            <a:lvl3pPr marL="122347" indent="0">
+              <a:buNone/>
+              <a:defRPr sz="161"/>
             </a:lvl3pPr>
-            <a:lvl4pPr marL="166101" indent="0">
-              <a:buNone/>
-              <a:defRPr sz="121"/>
+            <a:lvl4pPr marL="183520" indent="0">
+              <a:buNone/>
+              <a:defRPr sz="134"/>
             </a:lvl4pPr>
-            <a:lvl5pPr marL="221468" indent="0">
-              <a:buNone/>
-              <a:defRPr sz="121"/>
+            <a:lvl5pPr marL="244693" indent="0">
+              <a:buNone/>
+              <a:defRPr sz="134"/>
             </a:lvl5pPr>
-            <a:lvl6pPr marL="276835" indent="0">
-              <a:buNone/>
-              <a:defRPr sz="121"/>
+            <a:lvl6pPr marL="305867" indent="0">
+              <a:buNone/>
+              <a:defRPr sz="134"/>
             </a:lvl6pPr>
-            <a:lvl7pPr marL="332202" indent="0">
-              <a:buNone/>
-              <a:defRPr sz="121"/>
+            <a:lvl7pPr marL="367040" indent="0">
+              <a:buNone/>
+              <a:defRPr sz="134"/>
             </a:lvl7pPr>
-            <a:lvl8pPr marL="387568" indent="0">
-              <a:buNone/>
-              <a:defRPr sz="121"/>
+            <a:lvl8pPr marL="428214" indent="0">
+              <a:buNone/>
+              <a:defRPr sz="134"/>
             </a:lvl8pPr>
-            <a:lvl9pPr marL="442935" indent="0">
-              <a:buNone/>
-              <a:defRPr sz="121"/>
+            <a:lvl9pPr marL="489387" indent="0">
+              <a:buNone/>
+              <a:defRPr sz="134"/>
             </a:lvl9pPr>
           </a:lstStyle>
           <a:p>
@@ -3531,7 +2797,7 @@
           <a:p>
             <a:fld id="{CF9FBDB8-36C6-4744-999D-C99C2C96D370}" type="datetimeFigureOut">
               <a:rPr lang="en-DE" smtClean="0"/>
-              <a:t>13.05.26</a:t>
+              <a:t>15.05.26</a:t>
             </a:fld>
             <a:endParaRPr lang="en-DE"/>
           </a:p>
@@ -3582,7 +2848,7 @@
     </p:spTree>
     <p:extLst>
       <p:ext uri="{BB962C8B-B14F-4D97-AF65-F5344CB8AC3E}">
-        <p14:creationId xmlns:p14="http://schemas.microsoft.com/office/powerpoint/2010/main" val="3108783059"/>
+        <p14:creationId xmlns:p14="http://schemas.microsoft.com/office/powerpoint/2010/main" val="3262184943"/>
       </p:ext>
     </p:extLst>
   </p:cSld>
@@ -3626,8 +2892,8 @@
         </p:nvSpPr>
         <p:spPr>
           <a:xfrm>
-            <a:off x="101501" y="48683"/>
-            <a:ext cx="1273373" cy="176742"/>
+            <a:off x="203002" y="48853"/>
+            <a:ext cx="2546747" cy="177355"/>
           </a:xfrm>
           <a:prstGeom prst="rect">
             <a:avLst/>
@@ -3659,8 +2925,8 @@
         </p:nvSpPr>
         <p:spPr>
           <a:xfrm>
-            <a:off x="101501" y="243417"/>
-            <a:ext cx="1273373" cy="580178"/>
+            <a:off x="203002" y="244262"/>
+            <a:ext cx="2546747" cy="582193"/>
           </a:xfrm>
           <a:prstGeom prst="rect">
             <a:avLst/>
@@ -3721,8 +2987,8 @@
         </p:nvSpPr>
         <p:spPr>
           <a:xfrm>
-            <a:off x="101501" y="847514"/>
-            <a:ext cx="332184" cy="48683"/>
+            <a:off x="203001" y="850456"/>
+            <a:ext cx="664369" cy="48852"/>
           </a:xfrm>
           <a:prstGeom prst="rect">
             <a:avLst/>
@@ -3732,7 +2998,7 @@
           <a:bodyPr vert="horz" lIns="91440" tIns="45720" rIns="91440" bIns="45720" rtlCol="0" anchor="ctr"/>
           <a:lstStyle>
             <a:lvl1pPr algn="l">
-              <a:defRPr sz="145">
+              <a:defRPr sz="161">
                 <a:solidFill>
                   <a:schemeClr val="tx1">
                     <a:tint val="82000"/>
@@ -3744,7 +3010,7 @@
           <a:p>
             <a:fld id="{CF9FBDB8-36C6-4744-999D-C99C2C96D370}" type="datetimeFigureOut">
               <a:rPr lang="en-DE" smtClean="0"/>
-              <a:t>13.05.26</a:t>
+              <a:t>15.05.26</a:t>
             </a:fld>
             <a:endParaRPr lang="en-DE"/>
           </a:p>
@@ -3762,8 +3028,8 @@
         </p:nvSpPr>
         <p:spPr>
           <a:xfrm>
-            <a:off x="489049" y="847514"/>
-            <a:ext cx="498277" cy="48683"/>
+            <a:off x="978099" y="850456"/>
+            <a:ext cx="996553" cy="48852"/>
           </a:xfrm>
           <a:prstGeom prst="rect">
             <a:avLst/>
@@ -3773,7 +3039,7 @@
           <a:bodyPr vert="horz" lIns="91440" tIns="45720" rIns="91440" bIns="45720" rtlCol="0" anchor="ctr"/>
           <a:lstStyle>
             <a:lvl1pPr algn="ctr">
-              <a:defRPr sz="145">
+              <a:defRPr sz="161">
                 <a:solidFill>
                   <a:schemeClr val="tx1">
                     <a:tint val="82000"/>
@@ -3799,8 +3065,8 @@
         </p:nvSpPr>
         <p:spPr>
           <a:xfrm>
-            <a:off x="1042690" y="847514"/>
-            <a:ext cx="332184" cy="48683"/>
+            <a:off x="2085380" y="850456"/>
+            <a:ext cx="664369" cy="48852"/>
           </a:xfrm>
           <a:prstGeom prst="rect">
             <a:avLst/>
@@ -3810,7 +3076,7 @@
           <a:bodyPr vert="horz" lIns="91440" tIns="45720" rIns="91440" bIns="45720" rtlCol="0" anchor="ctr"/>
           <a:lstStyle>
             <a:lvl1pPr algn="r">
-              <a:defRPr sz="145">
+              <a:defRPr sz="161">
                 <a:solidFill>
                   <a:schemeClr val="tx1">
                     <a:tint val="82000"/>
@@ -3831,27 +3097,27 @@
     </p:spTree>
     <p:extLst>
       <p:ext uri="{BB962C8B-B14F-4D97-AF65-F5344CB8AC3E}">
-        <p14:creationId xmlns:p14="http://schemas.microsoft.com/office/powerpoint/2010/main" val="2394053369"/>
+        <p14:creationId xmlns:p14="http://schemas.microsoft.com/office/powerpoint/2010/main" val="3688320997"/>
       </p:ext>
     </p:extLst>
   </p:cSld>
   <p:clrMap bg1="lt1" tx1="dk1" bg2="lt2" tx2="dk2" accent1="accent1" accent2="accent2" accent3="accent3" accent4="accent4" accent5="accent5" accent6="accent6" hlink="hlink" folHlink="folHlink"/>
   <p:sldLayoutIdLst>
-    <p:sldLayoutId id="2147483853" r:id="rId1"/>
-    <p:sldLayoutId id="2147483854" r:id="rId2"/>
-    <p:sldLayoutId id="2147483855" r:id="rId3"/>
-    <p:sldLayoutId id="2147483856" r:id="rId4"/>
-    <p:sldLayoutId id="2147483857" r:id="rId5"/>
-    <p:sldLayoutId id="2147483858" r:id="rId6"/>
-    <p:sldLayoutId id="2147483859" r:id="rId7"/>
-    <p:sldLayoutId id="2147483860" r:id="rId8"/>
-    <p:sldLayoutId id="2147483861" r:id="rId9"/>
-    <p:sldLayoutId id="2147483862" r:id="rId10"/>
-    <p:sldLayoutId id="2147483863" r:id="rId11"/>
+    <p:sldLayoutId id="2147484081" r:id="rId1"/>
+    <p:sldLayoutId id="2147484082" r:id="rId2"/>
+    <p:sldLayoutId id="2147484083" r:id="rId3"/>
+    <p:sldLayoutId id="2147484084" r:id="rId4"/>
+    <p:sldLayoutId id="2147484085" r:id="rId5"/>
+    <p:sldLayoutId id="2147484086" r:id="rId6"/>
+    <p:sldLayoutId id="2147484087" r:id="rId7"/>
+    <p:sldLayoutId id="2147484088" r:id="rId8"/>
+    <p:sldLayoutId id="2147484089" r:id="rId9"/>
+    <p:sldLayoutId id="2147484090" r:id="rId10"/>
+    <p:sldLayoutId id="2147484091" r:id="rId11"/>
   </p:sldLayoutIdLst>
   <p:txStyles>
     <p:titleStyle>
-      <a:lvl1pPr algn="l" defTabSz="110734" rtl="0" eaLnBrk="1" latinLnBrk="0" hangingPunct="1">
+      <a:lvl1pPr algn="l" defTabSz="122347" rtl="0" eaLnBrk="1" latinLnBrk="0" hangingPunct="1">
         <a:lnSpc>
           <a:spcPct val="90000"/>
         </a:lnSpc>
@@ -3859,7 +3125,7 @@
           <a:spcPct val="0"/>
         </a:spcBef>
         <a:buNone/>
-        <a:defRPr sz="533" kern="1200">
+        <a:defRPr sz="589" kern="1200">
           <a:solidFill>
             <a:schemeClr val="tx1"/>
           </a:solidFill>
@@ -3870,16 +3136,16 @@
       </a:lvl1pPr>
     </p:titleStyle>
     <p:bodyStyle>
-      <a:lvl1pPr marL="27683" indent="-27683" algn="l" defTabSz="110734" rtl="0" eaLnBrk="1" latinLnBrk="0" hangingPunct="1">
+      <a:lvl1pPr marL="30587" indent="-30587" algn="l" defTabSz="122347" rtl="0" eaLnBrk="1" latinLnBrk="0" hangingPunct="1">
         <a:lnSpc>
           <a:spcPct val="90000"/>
         </a:lnSpc>
         <a:spcBef>
-          <a:spcPts val="121"/>
+          <a:spcPts val="134"/>
         </a:spcBef>
         <a:buFont typeface="Arial" panose="020B0604020202020204" pitchFamily="34" charset="0"/>
         <a:buChar char="•"/>
-        <a:defRPr sz="339" kern="1200">
+        <a:defRPr sz="375" kern="1200">
           <a:solidFill>
             <a:schemeClr val="tx1"/>
           </a:solidFill>
@@ -3888,16 +3154,16 @@
           <a:cs typeface="+mn-cs"/>
         </a:defRPr>
       </a:lvl1pPr>
-      <a:lvl2pPr marL="83050" indent="-27683" algn="l" defTabSz="110734" rtl="0" eaLnBrk="1" latinLnBrk="0" hangingPunct="1">
+      <a:lvl2pPr marL="91760" indent="-30587" algn="l" defTabSz="122347" rtl="0" eaLnBrk="1" latinLnBrk="0" hangingPunct="1">
         <a:lnSpc>
           <a:spcPct val="90000"/>
         </a:lnSpc>
         <a:spcBef>
-          <a:spcPts val="61"/>
+          <a:spcPts val="67"/>
         </a:spcBef>
         <a:buFont typeface="Arial" panose="020B0604020202020204" pitchFamily="34" charset="0"/>
         <a:buChar char="•"/>
-        <a:defRPr sz="291" kern="1200">
+        <a:defRPr sz="321" kern="1200">
           <a:solidFill>
             <a:schemeClr val="tx1"/>
           </a:solidFill>
@@ -3906,16 +3172,16 @@
           <a:cs typeface="+mn-cs"/>
         </a:defRPr>
       </a:lvl2pPr>
-      <a:lvl3pPr marL="138417" indent="-27683" algn="l" defTabSz="110734" rtl="0" eaLnBrk="1" latinLnBrk="0" hangingPunct="1">
+      <a:lvl3pPr marL="152933" indent="-30587" algn="l" defTabSz="122347" rtl="0" eaLnBrk="1" latinLnBrk="0" hangingPunct="1">
         <a:lnSpc>
           <a:spcPct val="90000"/>
         </a:lnSpc>
         <a:spcBef>
-          <a:spcPts val="61"/>
+          <a:spcPts val="67"/>
         </a:spcBef>
         <a:buFont typeface="Arial" panose="020B0604020202020204" pitchFamily="34" charset="0"/>
         <a:buChar char="•"/>
-        <a:defRPr sz="242" kern="1200">
+        <a:defRPr sz="268" kern="1200">
           <a:solidFill>
             <a:schemeClr val="tx1"/>
           </a:solidFill>
@@ -3924,16 +3190,16 @@
           <a:cs typeface="+mn-cs"/>
         </a:defRPr>
       </a:lvl3pPr>
-      <a:lvl4pPr marL="193784" indent="-27683" algn="l" defTabSz="110734" rtl="0" eaLnBrk="1" latinLnBrk="0" hangingPunct="1">
+      <a:lvl4pPr marL="214107" indent="-30587" algn="l" defTabSz="122347" rtl="0" eaLnBrk="1" latinLnBrk="0" hangingPunct="1">
         <a:lnSpc>
           <a:spcPct val="90000"/>
         </a:lnSpc>
         <a:spcBef>
-          <a:spcPts val="61"/>
+          <a:spcPts val="67"/>
         </a:spcBef>
         <a:buFont typeface="Arial" panose="020B0604020202020204" pitchFamily="34" charset="0"/>
         <a:buChar char="•"/>
-        <a:defRPr sz="218" kern="1200">
+        <a:defRPr sz="241" kern="1200">
           <a:solidFill>
             <a:schemeClr val="tx1"/>
           </a:solidFill>
@@ -3942,16 +3208,16 @@
           <a:cs typeface="+mn-cs"/>
         </a:defRPr>
       </a:lvl4pPr>
-      <a:lvl5pPr marL="249151" indent="-27683" algn="l" defTabSz="110734" rtl="0" eaLnBrk="1" latinLnBrk="0" hangingPunct="1">
+      <a:lvl5pPr marL="275280" indent="-30587" algn="l" defTabSz="122347" rtl="0" eaLnBrk="1" latinLnBrk="0" hangingPunct="1">
         <a:lnSpc>
           <a:spcPct val="90000"/>
         </a:lnSpc>
         <a:spcBef>
-          <a:spcPts val="61"/>
+          <a:spcPts val="67"/>
         </a:spcBef>
         <a:buFont typeface="Arial" panose="020B0604020202020204" pitchFamily="34" charset="0"/>
         <a:buChar char="•"/>
-        <a:defRPr sz="218" kern="1200">
+        <a:defRPr sz="241" kern="1200">
           <a:solidFill>
             <a:schemeClr val="tx1"/>
           </a:solidFill>
@@ -3960,16 +3226,16 @@
           <a:cs typeface="+mn-cs"/>
         </a:defRPr>
       </a:lvl5pPr>
-      <a:lvl6pPr marL="304518" indent="-27683" algn="l" defTabSz="110734" rtl="0" eaLnBrk="1" latinLnBrk="0" hangingPunct="1">
+      <a:lvl6pPr marL="336453" indent="-30587" algn="l" defTabSz="122347" rtl="0" eaLnBrk="1" latinLnBrk="0" hangingPunct="1">
         <a:lnSpc>
           <a:spcPct val="90000"/>
         </a:lnSpc>
         <a:spcBef>
-          <a:spcPts val="61"/>
+          <a:spcPts val="67"/>
         </a:spcBef>
         <a:buFont typeface="Arial" panose="020B0604020202020204" pitchFamily="34" charset="0"/>
         <a:buChar char="•"/>
-        <a:defRPr sz="218" kern="1200">
+        <a:defRPr sz="241" kern="1200">
           <a:solidFill>
             <a:schemeClr val="tx1"/>
           </a:solidFill>
@@ -3978,16 +3244,16 @@
           <a:cs typeface="+mn-cs"/>
         </a:defRPr>
       </a:lvl6pPr>
-      <a:lvl7pPr marL="359885" indent="-27683" algn="l" defTabSz="110734" rtl="0" eaLnBrk="1" latinLnBrk="0" hangingPunct="1">
+      <a:lvl7pPr marL="397627" indent="-30587" algn="l" defTabSz="122347" rtl="0" eaLnBrk="1" latinLnBrk="0" hangingPunct="1">
         <a:lnSpc>
           <a:spcPct val="90000"/>
         </a:lnSpc>
         <a:spcBef>
-          <a:spcPts val="61"/>
+          <a:spcPts val="67"/>
         </a:spcBef>
         <a:buFont typeface="Arial" panose="020B0604020202020204" pitchFamily="34" charset="0"/>
         <a:buChar char="•"/>
-        <a:defRPr sz="218" kern="1200">
+        <a:defRPr sz="241" kern="1200">
           <a:solidFill>
             <a:schemeClr val="tx1"/>
           </a:solidFill>
@@ -3996,16 +3262,16 @@
           <a:cs typeface="+mn-cs"/>
         </a:defRPr>
       </a:lvl7pPr>
-      <a:lvl8pPr marL="415252" indent="-27683" algn="l" defTabSz="110734" rtl="0" eaLnBrk="1" latinLnBrk="0" hangingPunct="1">
+      <a:lvl8pPr marL="458800" indent="-30587" algn="l" defTabSz="122347" rtl="0" eaLnBrk="1" latinLnBrk="0" hangingPunct="1">
         <a:lnSpc>
           <a:spcPct val="90000"/>
         </a:lnSpc>
         <a:spcBef>
-          <a:spcPts val="61"/>
+          <a:spcPts val="67"/>
         </a:spcBef>
         <a:buFont typeface="Arial" panose="020B0604020202020204" pitchFamily="34" charset="0"/>
         <a:buChar char="•"/>
-        <a:defRPr sz="218" kern="1200">
+        <a:defRPr sz="241" kern="1200">
           <a:solidFill>
             <a:schemeClr val="tx1"/>
           </a:solidFill>
@@ -4014,16 +3280,16 @@
           <a:cs typeface="+mn-cs"/>
         </a:defRPr>
       </a:lvl8pPr>
-      <a:lvl9pPr marL="470619" indent="-27683" algn="l" defTabSz="110734" rtl="0" eaLnBrk="1" latinLnBrk="0" hangingPunct="1">
+      <a:lvl9pPr marL="519974" indent="-30587" algn="l" defTabSz="122347" rtl="0" eaLnBrk="1" latinLnBrk="0" hangingPunct="1">
         <a:lnSpc>
           <a:spcPct val="90000"/>
         </a:lnSpc>
         <a:spcBef>
-          <a:spcPts val="61"/>
+          <a:spcPts val="67"/>
         </a:spcBef>
         <a:buFont typeface="Arial" panose="020B0604020202020204" pitchFamily="34" charset="0"/>
         <a:buChar char="•"/>
-        <a:defRPr sz="218" kern="1200">
+        <a:defRPr sz="241" kern="1200">
           <a:solidFill>
             <a:schemeClr val="tx1"/>
           </a:solidFill>
@@ -4037,8 +3303,8 @@
       <a:defPPr>
         <a:defRPr lang="en-US"/>
       </a:defPPr>
-      <a:lvl1pPr marL="0" algn="l" defTabSz="110734" rtl="0" eaLnBrk="1" latinLnBrk="0" hangingPunct="1">
-        <a:defRPr sz="218" kern="1200">
+      <a:lvl1pPr marL="0" algn="l" defTabSz="122347" rtl="0" eaLnBrk="1" latinLnBrk="0" hangingPunct="1">
+        <a:defRPr sz="241" kern="1200">
           <a:solidFill>
             <a:schemeClr val="tx1"/>
           </a:solidFill>
@@ -4047,8 +3313,8 @@
           <a:cs typeface="+mn-cs"/>
         </a:defRPr>
       </a:lvl1pPr>
-      <a:lvl2pPr marL="55367" algn="l" defTabSz="110734" rtl="0" eaLnBrk="1" latinLnBrk="0" hangingPunct="1">
-        <a:defRPr sz="218" kern="1200">
+      <a:lvl2pPr marL="61173" algn="l" defTabSz="122347" rtl="0" eaLnBrk="1" latinLnBrk="0" hangingPunct="1">
+        <a:defRPr sz="241" kern="1200">
           <a:solidFill>
             <a:schemeClr val="tx1"/>
           </a:solidFill>
@@ -4057,8 +3323,8 @@
           <a:cs typeface="+mn-cs"/>
         </a:defRPr>
       </a:lvl2pPr>
-      <a:lvl3pPr marL="110734" algn="l" defTabSz="110734" rtl="0" eaLnBrk="1" latinLnBrk="0" hangingPunct="1">
-        <a:defRPr sz="218" kern="1200">
+      <a:lvl3pPr marL="122347" algn="l" defTabSz="122347" rtl="0" eaLnBrk="1" latinLnBrk="0" hangingPunct="1">
+        <a:defRPr sz="241" kern="1200">
           <a:solidFill>
             <a:schemeClr val="tx1"/>
           </a:solidFill>
@@ -4067,8 +3333,8 @@
           <a:cs typeface="+mn-cs"/>
         </a:defRPr>
       </a:lvl3pPr>
-      <a:lvl4pPr marL="166101" algn="l" defTabSz="110734" rtl="0" eaLnBrk="1" latinLnBrk="0" hangingPunct="1">
-        <a:defRPr sz="218" kern="1200">
+      <a:lvl4pPr marL="183520" algn="l" defTabSz="122347" rtl="0" eaLnBrk="1" latinLnBrk="0" hangingPunct="1">
+        <a:defRPr sz="241" kern="1200">
           <a:solidFill>
             <a:schemeClr val="tx1"/>
           </a:solidFill>
@@ -4077,8 +3343,8 @@
           <a:cs typeface="+mn-cs"/>
         </a:defRPr>
       </a:lvl4pPr>
-      <a:lvl5pPr marL="221468" algn="l" defTabSz="110734" rtl="0" eaLnBrk="1" latinLnBrk="0" hangingPunct="1">
-        <a:defRPr sz="218" kern="1200">
+      <a:lvl5pPr marL="244693" algn="l" defTabSz="122347" rtl="0" eaLnBrk="1" latinLnBrk="0" hangingPunct="1">
+        <a:defRPr sz="241" kern="1200">
           <a:solidFill>
             <a:schemeClr val="tx1"/>
           </a:solidFill>
@@ -4087,8 +3353,8 @@
           <a:cs typeface="+mn-cs"/>
         </a:defRPr>
       </a:lvl5pPr>
-      <a:lvl6pPr marL="276835" algn="l" defTabSz="110734" rtl="0" eaLnBrk="1" latinLnBrk="0" hangingPunct="1">
-        <a:defRPr sz="218" kern="1200">
+      <a:lvl6pPr marL="305867" algn="l" defTabSz="122347" rtl="0" eaLnBrk="1" latinLnBrk="0" hangingPunct="1">
+        <a:defRPr sz="241" kern="1200">
           <a:solidFill>
             <a:schemeClr val="tx1"/>
           </a:solidFill>
@@ -4097,8 +3363,8 @@
           <a:cs typeface="+mn-cs"/>
         </a:defRPr>
       </a:lvl6pPr>
-      <a:lvl7pPr marL="332202" algn="l" defTabSz="110734" rtl="0" eaLnBrk="1" latinLnBrk="0" hangingPunct="1">
-        <a:defRPr sz="218" kern="1200">
+      <a:lvl7pPr marL="367040" algn="l" defTabSz="122347" rtl="0" eaLnBrk="1" latinLnBrk="0" hangingPunct="1">
+        <a:defRPr sz="241" kern="1200">
           <a:solidFill>
             <a:schemeClr val="tx1"/>
           </a:solidFill>
@@ -4107,8 +3373,8 @@
           <a:cs typeface="+mn-cs"/>
         </a:defRPr>
       </a:lvl7pPr>
-      <a:lvl8pPr marL="387568" algn="l" defTabSz="110734" rtl="0" eaLnBrk="1" latinLnBrk="0" hangingPunct="1">
-        <a:defRPr sz="218" kern="1200">
+      <a:lvl8pPr marL="428214" algn="l" defTabSz="122347" rtl="0" eaLnBrk="1" latinLnBrk="0" hangingPunct="1">
+        <a:defRPr sz="241" kern="1200">
           <a:solidFill>
             <a:schemeClr val="tx1"/>
           </a:solidFill>
@@ -4117,8 +3383,8 @@
           <a:cs typeface="+mn-cs"/>
         </a:defRPr>
       </a:lvl8pPr>
-      <a:lvl9pPr marL="442935" algn="l" defTabSz="110734" rtl="0" eaLnBrk="1" latinLnBrk="0" hangingPunct="1">
-        <a:defRPr sz="218" kern="1200">
+      <a:lvl9pPr marL="489387" algn="l" defTabSz="122347" rtl="0" eaLnBrk="1" latinLnBrk="0" hangingPunct="1">
+        <a:defRPr sz="241" kern="1200">
           <a:solidFill>
             <a:schemeClr val="tx1"/>
           </a:solidFill>
@@ -4149,152 +3415,12 @@
           <a:chExt cx="0" cy="0"/>
         </a:xfrm>
       </p:grpSpPr>
-      <p:sp>
-        <p:nvSpPr>
-          <p:cNvPr id="16" name="TextBox 15">
+      <p:pic>
+        <p:nvPicPr>
+          <p:cNvPr id="2" name="Picture 1">
             <a:extLst>
               <a:ext uri="{FF2B5EF4-FFF2-40B4-BE49-F238E27FC236}">
-                <a16:creationId xmlns:a16="http://schemas.microsoft.com/office/drawing/2014/main" id="{77DDB3D0-46E1-BC04-528D-A0327F1E0686}"/>
-              </a:ext>
-            </a:extLst>
-          </p:cNvPr>
-          <p:cNvSpPr txBox="1"/>
-          <p:nvPr/>
-        </p:nvSpPr>
-        <p:spPr>
-          <a:xfrm>
-            <a:off x="-15876" y="-45086"/>
-            <a:ext cx="68131" cy="159400"/>
-          </a:xfrm>
-          <a:prstGeom prst="rect">
-            <a:avLst/>
-          </a:prstGeom>
-          <a:noFill/>
-        </p:spPr>
-        <p:txBody>
-          <a:bodyPr wrap="square" rtlCol="0">
-            <a:spAutoFit/>
-          </a:bodyPr>
-          <a:lstStyle/>
-          <a:p>
-            <a:r>
-              <a:rPr lang="en-DE" sz="400" b="1" dirty="0"/>
-              <a:t>A</a:t>
-            </a:r>
-          </a:p>
-        </p:txBody>
-      </p:sp>
-      <p:sp>
-        <p:nvSpPr>
-          <p:cNvPr id="18" name="TextBox 17">
-            <a:extLst>
-              <a:ext uri="{FF2B5EF4-FFF2-40B4-BE49-F238E27FC236}">
-                <a16:creationId xmlns:a16="http://schemas.microsoft.com/office/drawing/2014/main" id="{52949594-F889-C26B-18C9-994B8EA6AE48}"/>
-              </a:ext>
-            </a:extLst>
-          </p:cNvPr>
-          <p:cNvSpPr txBox="1"/>
-          <p:nvPr/>
-        </p:nvSpPr>
-        <p:spPr>
-          <a:xfrm>
-            <a:off x="695086" y="-45086"/>
-            <a:ext cx="68131" cy="159400"/>
-          </a:xfrm>
-          <a:prstGeom prst="rect">
-            <a:avLst/>
-          </a:prstGeom>
-          <a:noFill/>
-        </p:spPr>
-        <p:txBody>
-          <a:bodyPr wrap="square" rtlCol="0">
-            <a:spAutoFit/>
-          </a:bodyPr>
-          <a:lstStyle/>
-          <a:p>
-            <a:r>
-              <a:rPr lang="en-DE" sz="400" b="1" dirty="0"/>
-              <a:t>B</a:t>
-            </a:r>
-          </a:p>
-        </p:txBody>
-      </p:sp>
-      <p:sp>
-        <p:nvSpPr>
-          <p:cNvPr id="22" name="TextBox 21">
-            <a:extLst>
-              <a:ext uri="{FF2B5EF4-FFF2-40B4-BE49-F238E27FC236}">
-                <a16:creationId xmlns:a16="http://schemas.microsoft.com/office/drawing/2014/main" id="{1605523A-7734-FFCC-E008-89DF40D8432C}"/>
-              </a:ext>
-            </a:extLst>
-          </p:cNvPr>
-          <p:cNvSpPr txBox="1"/>
-          <p:nvPr/>
-        </p:nvSpPr>
-        <p:spPr>
-          <a:xfrm>
-            <a:off x="-25559" y="414264"/>
-            <a:ext cx="68131" cy="159400"/>
-          </a:xfrm>
-          <a:prstGeom prst="rect">
-            <a:avLst/>
-          </a:prstGeom>
-          <a:noFill/>
-        </p:spPr>
-        <p:txBody>
-          <a:bodyPr wrap="square" rtlCol="0">
-            <a:spAutoFit/>
-          </a:bodyPr>
-          <a:lstStyle/>
-          <a:p>
-            <a:r>
-              <a:rPr lang="en-DE" sz="400" b="1" dirty="0"/>
-              <a:t>C</a:t>
-            </a:r>
-          </a:p>
-        </p:txBody>
-      </p:sp>
-      <p:sp>
-        <p:nvSpPr>
-          <p:cNvPr id="23" name="TextBox 22">
-            <a:extLst>
-              <a:ext uri="{FF2B5EF4-FFF2-40B4-BE49-F238E27FC236}">
-                <a16:creationId xmlns:a16="http://schemas.microsoft.com/office/drawing/2014/main" id="{CF0718D8-0CC5-2BC0-5BF5-C4225E2CF9DB}"/>
-              </a:ext>
-            </a:extLst>
-          </p:cNvPr>
-          <p:cNvSpPr txBox="1"/>
-          <p:nvPr/>
-        </p:nvSpPr>
-        <p:spPr>
-          <a:xfrm>
-            <a:off x="687986" y="414264"/>
-            <a:ext cx="68131" cy="159400"/>
-          </a:xfrm>
-          <a:prstGeom prst="rect">
-            <a:avLst/>
-          </a:prstGeom>
-          <a:noFill/>
-        </p:spPr>
-        <p:txBody>
-          <a:bodyPr wrap="square" rtlCol="0">
-            <a:spAutoFit/>
-          </a:bodyPr>
-          <a:lstStyle/>
-          <a:p>
-            <a:r>
-              <a:rPr lang="en-DE" sz="400" b="1" dirty="0"/>
-              <a:t>D</a:t>
-            </a:r>
-          </a:p>
-        </p:txBody>
-      </p:sp>
-      <p:pic>
-        <p:nvPicPr>
-          <p:cNvPr id="3" name="Picture 2">
-            <a:extLst>
-              <a:ext uri="{FF2B5EF4-FFF2-40B4-BE49-F238E27FC236}">
-                <a16:creationId xmlns:a16="http://schemas.microsoft.com/office/drawing/2014/main" id="{6845AA6C-1ED5-96D8-5C96-130743FB8B00}"/>
+                <a16:creationId xmlns:a16="http://schemas.microsoft.com/office/drawing/2014/main" id="{088DB47C-7D7F-CCAB-40D6-9AD70E216777}"/>
               </a:ext>
             </a:extLst>
           </p:cNvPr>
@@ -4311,8 +3437,8 @@
         </p:blipFill>
         <p:spPr>
           <a:xfrm>
-            <a:off x="35028" y="17072"/>
-            <a:ext cx="672255" cy="448170"/>
+            <a:off x="0" y="80491"/>
+            <a:ext cx="1843315" cy="789809"/>
           </a:xfrm>
           <a:prstGeom prst="rect">
             <a:avLst/>
@@ -4321,10 +3447,10 @@
       </p:pic>
       <p:pic>
         <p:nvPicPr>
-          <p:cNvPr id="5" name="Picture 4">
+          <p:cNvPr id="3" name="Picture 2">
             <a:extLst>
               <a:ext uri="{FF2B5EF4-FFF2-40B4-BE49-F238E27FC236}">
-                <a16:creationId xmlns:a16="http://schemas.microsoft.com/office/drawing/2014/main" id="{95034590-05D0-06EE-52A2-6A09044B27E0}"/>
+                <a16:creationId xmlns:a16="http://schemas.microsoft.com/office/drawing/2014/main" id="{A672D257-3002-98FC-82A4-2498781FBE4C}"/>
               </a:ext>
             </a:extLst>
           </p:cNvPr>
@@ -4341,78 +3467,88 @@
         </p:blipFill>
         <p:spPr>
           <a:xfrm>
-            <a:off x="772742" y="11375"/>
-            <a:ext cx="679822" cy="453214"/>
+            <a:off x="1812925" y="96741"/>
+            <a:ext cx="1139825" cy="651329"/>
           </a:xfrm>
           <a:prstGeom prst="rect">
             <a:avLst/>
           </a:prstGeom>
         </p:spPr>
       </p:pic>
-      <p:pic>
-        <p:nvPicPr>
-          <p:cNvPr id="8" name="Picture 7">
+      <p:sp>
+        <p:nvSpPr>
+          <p:cNvPr id="4" name="TextBox 3">
             <a:extLst>
               <a:ext uri="{FF2B5EF4-FFF2-40B4-BE49-F238E27FC236}">
-                <a16:creationId xmlns:a16="http://schemas.microsoft.com/office/drawing/2014/main" id="{00F3ACCB-C62E-1AF4-47B4-323C6572A79C}"/>
+                <a16:creationId xmlns:a16="http://schemas.microsoft.com/office/drawing/2014/main" id="{CC7D1463-1312-0723-4518-D2FA4CA564F6}"/>
               </a:ext>
             </a:extLst>
           </p:cNvPr>
-          <p:cNvPicPr>
-            <a:picLocks noChangeAspect="1"/>
-          </p:cNvPicPr>
+          <p:cNvSpPr txBox="1"/>
           <p:nvPr/>
-        </p:nvPicPr>
-        <p:blipFill>
-          <a:blip r:embed="rId5"/>
-          <a:stretch>
-            <a:fillRect/>
-          </a:stretch>
-        </p:blipFill>
+        </p:nvSpPr>
         <p:spPr>
           <a:xfrm>
-            <a:off x="775294" y="467943"/>
-            <a:ext cx="674717" cy="449811"/>
+            <a:off x="-61559" y="-37179"/>
+            <a:ext cx="235750" cy="200055"/>
           </a:xfrm>
           <a:prstGeom prst="rect">
             <a:avLst/>
           </a:prstGeom>
+          <a:noFill/>
         </p:spPr>
-      </p:pic>
-      <p:pic>
-        <p:nvPicPr>
-          <p:cNvPr id="10" name="Picture 9">
+        <p:txBody>
+          <a:bodyPr wrap="square" rtlCol="0">
+            <a:spAutoFit/>
+          </a:bodyPr>
+          <a:lstStyle/>
+          <a:p>
+            <a:r>
+              <a:rPr lang="en-DE" sz="700" b="1" dirty="0"/>
+              <a:t>A</a:t>
+            </a:r>
+          </a:p>
+        </p:txBody>
+      </p:sp>
+      <p:sp>
+        <p:nvSpPr>
+          <p:cNvPr id="5" name="TextBox 4">
             <a:extLst>
               <a:ext uri="{FF2B5EF4-FFF2-40B4-BE49-F238E27FC236}">
-                <a16:creationId xmlns:a16="http://schemas.microsoft.com/office/drawing/2014/main" id="{D6750190-5E24-E187-C293-779F059ABF48}"/>
+                <a16:creationId xmlns:a16="http://schemas.microsoft.com/office/drawing/2014/main" id="{33B89416-371C-44E8-0359-E23C9CBFA912}"/>
               </a:ext>
             </a:extLst>
           </p:cNvPr>
-          <p:cNvPicPr>
-            <a:picLocks noChangeAspect="1"/>
-          </p:cNvPicPr>
+          <p:cNvSpPr txBox="1"/>
           <p:nvPr/>
-        </p:nvPicPr>
-        <p:blipFill>
-          <a:blip r:embed="rId6"/>
-          <a:stretch>
-            <a:fillRect/>
-          </a:stretch>
-        </p:blipFill>
+        </p:nvSpPr>
         <p:spPr>
           <a:xfrm>
-            <a:off x="35028" y="464589"/>
-            <a:ext cx="674717" cy="449811"/>
+            <a:off x="1725440" y="-29062"/>
+            <a:ext cx="235750" cy="200055"/>
           </a:xfrm>
           <a:prstGeom prst="rect">
             <a:avLst/>
           </a:prstGeom>
+          <a:noFill/>
         </p:spPr>
-      </p:pic>
+        <p:txBody>
+          <a:bodyPr wrap="square" rtlCol="0">
+            <a:spAutoFit/>
+          </a:bodyPr>
+          <a:lstStyle/>
+          <a:p>
+            <a:r>
+              <a:rPr lang="en-DE" sz="700" b="1" dirty="0"/>
+              <a:t>B</a:t>
+            </a:r>
+          </a:p>
+        </p:txBody>
+      </p:sp>
     </p:spTree>
     <p:extLst>
       <p:ext uri="{BB962C8B-B14F-4D97-AF65-F5344CB8AC3E}">
-        <p14:creationId xmlns:p14="http://schemas.microsoft.com/office/powerpoint/2010/main" val="1135184855"/>
+        <p14:creationId xmlns:p14="http://schemas.microsoft.com/office/powerpoint/2010/main" val="1064014603"/>
       </p:ext>
     </p:extLst>
   </p:cSld>
